--- a/11а клас/ООП/07. Елементи от функционалното програмиране/07.3. Библиотека за обработка на колекции LINQ и ламбда и още.pptx
+++ b/11а клас/ООП/07. Елементи от функционалното програмиране/07.3. Библиотека за обработка на колекции LINQ и ламбда и още.pptx
@@ -9,6 +9,7 @@
   </p:notesMasterIdLst>
   <p:sldIdLst>
     <p:sldId id="258" r:id="rId2"/>
+    <p:sldId id="615" r:id="rId22"/>
     <p:sldId id="571" r:id="rId3"/>
     <p:sldId id="606" r:id="rId4"/>
     <p:sldId id="607" r:id="rId5"/>
@@ -19,6 +20,12 @@
     <p:sldId id="612" r:id="rId10"/>
     <p:sldId id="613" r:id="rId11"/>
     <p:sldId id="614" r:id="rId12"/>
+    <p:sldId id="616" r:id="rId23"/>
+    <p:sldId id="617" r:id="rId24"/>
+    <p:sldId id="618" r:id="rId25"/>
+    <p:sldId id="619" r:id="rId26"/>
+    <p:sldId id="620" r:id="rId27"/>
+    <p:sldId id="621" r:id="rId28"/>
     <p:sldId id="605" r:id="rId13"/>
     <p:sldId id="572" r:id="rId14"/>
   </p:sldIdLst>
@@ -581,7 +588,9 @@
           <a:bodyPr/>
           <a:lstStyle/>
           <a:p>
-            <a:endParaRPr lang="bg-BG"/>
+            <a:r>
+              <a:t>Прегледайте темите набързо. Уточнете, че днес учениците ще могат да решават реални задачи с колекции с минимален код. Запитайте: 'Кой е писал for-цикъл само за да намери минималния елемент?'</a:t>
+            </a:r>
           </a:p>
         </p:txBody>
       </p:sp>
@@ -666,6 +675,831 @@
         <p14:creationId xmlns:p14="http://schemas.microsoft.com/office/powerpoint/2010/main" val="2682017479"/>
       </p:ext>
     </p:extLst>
+  </p:cSld>
+  <p:clrMapOvr>
+    <a:masterClrMapping/>
+  </p:clrMapOvr>
+</p:notes>
+</file>
+
+<file path=ppt/notesSlides/notesSlide10.xml><?xml version="1.0" encoding="utf-8"?>
+<p:notes xmlns:a="http://schemas.openxmlformats.org/drawingml/2006/main" xmlns:p="http://schemas.openxmlformats.org/presentationml/2006/main" xmlns:r="http://schemas.openxmlformats.org/officeDocument/2006/relationships">
+  <p:cSld>
+    <p:spTree>
+      <p:nvGrpSpPr>
+        <p:cNvPr id="1" name=""/>
+        <p:cNvGrpSpPr/>
+        <p:nvPr/>
+      </p:nvGrpSpPr>
+      <p:grpSpPr>
+        <a:xfrm>
+          <a:off x="0" y="0"/>
+          <a:ext cx="0" cy="0"/>
+          <a:chOff x="0" y="0"/>
+          <a:chExt cx="0" cy="0"/>
+        </a:xfrm>
+      </p:grpSpPr>
+      <p:sp>
+        <p:nvSpPr>
+          <p:cNvPr id="2" name="Slide Image Placeholder 1"/>
+          <p:cNvSpPr>
+            <a:spLocks noGrp="1"/>
+          </p:cNvSpPr>
+          <p:nvPr>
+            <p:ph type="sldImg" idx="2"/>
+          </p:nvPr>
+        </p:nvSpPr>
+        <p:spPr/>
+      </p:sp>
+      <p:sp>
+        <p:nvSpPr>
+          <p:cNvPr id="3" name="Notes Placeholder 2"/>
+          <p:cNvSpPr>
+            <a:spLocks noGrp="1"/>
+          </p:cNvSpPr>
+          <p:nvPr>
+            <p:ph type="body" idx="3" sz="quarter"/>
+          </p:nvPr>
+        </p:nvSpPr>
+        <p:spPr/>
+        <p:txBody>
+          <a:bodyPr/>
+          <a:lstStyle/>
+          <a:p>
+            <a:r>
+              <a:t>Reverse() в LINQ не е същото като Array.Reverse() — LINQ връща нов IEnumerable. Concat обединява две колекции без дублиране (за разлика от Union). Покажете разликата: Concat запазва дубликати, Union ги премахва.</a:t>
+            </a:r>
+          </a:p>
+        </p:txBody>
+      </p:sp>
+      <p:sp>
+        <p:nvSpPr>
+          <p:cNvPr id="4" name="Slide Number Placeholder 3"/>
+          <p:cNvSpPr>
+            <a:spLocks noGrp="1"/>
+          </p:cNvSpPr>
+          <p:nvPr>
+            <p:ph type="sldNum" idx="5" sz="quarter"/>
+          </p:nvPr>
+        </p:nvSpPr>
+        <p:spPr/>
+      </p:sp>
+    </p:spTree>
+  </p:cSld>
+  <p:clrMapOvr>
+    <a:masterClrMapping/>
+  </p:clrMapOvr>
+</p:notes>
+</file>
+
+<file path=ppt/notesSlides/notesSlide11.xml><?xml version="1.0" encoding="utf-8"?>
+<p:notes xmlns:a="http://schemas.openxmlformats.org/drawingml/2006/main" xmlns:p="http://schemas.openxmlformats.org/presentationml/2006/main" xmlns:r="http://schemas.openxmlformats.org/officeDocument/2006/relationships">
+  <p:cSld>
+    <p:spTree>
+      <p:nvGrpSpPr>
+        <p:cNvPr id="1" name=""/>
+        <p:cNvGrpSpPr/>
+        <p:nvPr/>
+      </p:nvGrpSpPr>
+      <p:grpSpPr>
+        <a:xfrm>
+          <a:off x="0" y="0"/>
+          <a:ext cx="0" cy="0"/>
+          <a:chOff x="0" y="0"/>
+          <a:chExt cx="0" cy="0"/>
+        </a:xfrm>
+      </p:grpSpPr>
+      <p:sp>
+        <p:nvSpPr>
+          <p:cNvPr id="2" name="Slide Image Placeholder 1"/>
+          <p:cNvSpPr>
+            <a:spLocks noGrp="1"/>
+          </p:cNvSpPr>
+          <p:nvPr>
+            <p:ph type="sldImg" idx="2"/>
+          </p:nvPr>
+        </p:nvSpPr>
+        <p:spPr/>
+      </p:sp>
+      <p:sp>
+        <p:nvSpPr>
+          <p:cNvPr id="3" name="Notes Placeholder 2"/>
+          <p:cNvSpPr>
+            <a:spLocks noGrp="1"/>
+          </p:cNvSpPr>
+          <p:nvPr>
+            <p:ph type="body" idx="3" sz="quarter"/>
+          </p:nvPr>
+        </p:nvSpPr>
+        <p:spPr/>
+        <p:txBody>
+          <a:bodyPr/>
+          <a:lstStyle/>
+          <a:p>
+            <a:r>
+              <a:t>По-сложна задача — разберете визуализацията на 'сгъване'. Обяснете: масивът се разделя на 4 части, двете крайни се обръщат и се поставят отгоре. Нека учениците нарисуват схемата на хартия преди да започнат да пишат код.</a:t>
+            </a:r>
+          </a:p>
+        </p:txBody>
+      </p:sp>
+      <p:sp>
+        <p:nvSpPr>
+          <p:cNvPr id="4" name="Slide Number Placeholder 3"/>
+          <p:cNvSpPr>
+            <a:spLocks noGrp="1"/>
+          </p:cNvSpPr>
+          <p:nvPr>
+            <p:ph type="sldNum" idx="5" sz="quarter"/>
+          </p:nvPr>
+        </p:nvSpPr>
+        <p:spPr/>
+      </p:sp>
+    </p:spTree>
+  </p:cSld>
+  <p:clrMapOvr>
+    <a:masterClrMapping/>
+  </p:clrMapOvr>
+</p:notes>
+</file>
+
+<file path=ppt/notesSlides/notesSlide12.xml><?xml version="1.0" encoding="utf-8"?>
+<p:notes xmlns:a="http://schemas.openxmlformats.org/drawingml/2006/main" xmlns:p="http://schemas.openxmlformats.org/presentationml/2006/main" xmlns:r="http://schemas.openxmlformats.org/officeDocument/2006/relationships">
+  <p:cSld>
+    <p:spTree>
+      <p:nvGrpSpPr>
+        <p:cNvPr id="1" name=""/>
+        <p:cNvGrpSpPr/>
+        <p:nvPr/>
+      </p:nvGrpSpPr>
+      <p:grpSpPr>
+        <a:xfrm>
+          <a:off x="0" y="0"/>
+          <a:ext cx="0" cy="0"/>
+          <a:chOff x="0" y="0"/>
+          <a:chExt cx="0" cy="0"/>
+        </a:xfrm>
+      </p:grpSpPr>
+      <p:sp>
+        <p:nvSpPr>
+          <p:cNvPr id="2" name="Slide Image Placeholder 1"/>
+          <p:cNvSpPr>
+            <a:spLocks noGrp="1"/>
+          </p:cNvSpPr>
+          <p:nvPr>
+            <p:ph type="sldImg" idx="2"/>
+          </p:nvPr>
+        </p:nvSpPr>
+        <p:spPr/>
+      </p:sp>
+      <p:sp>
+        <p:nvSpPr>
+          <p:cNvPr id="3" name="Notes Placeholder 2"/>
+          <p:cNvSpPr>
+            <a:spLocks noGrp="1"/>
+          </p:cNvSpPr>
+          <p:nvPr>
+            <p:ph type="body" idx="3" sz="quarter"/>
+          </p:nvPr>
+        </p:nvSpPr>
+        <p:spPr/>
+        <p:txBody>
+          <a:bodyPr/>
+          <a:lstStyle/>
+          <a:p>
+            <a:r>
+              <a:t>Обяснете Select((x, index) =&gt; ...) — тази версия на Select подава и индекса на елемента. Skip(k) прескача първите k елемента. Take(2*k) взима следващите 2*k. Reverse().Take(k) обръща и взима първите k (т.е. последните k от оригинала).</a:t>
+            </a:r>
+          </a:p>
+        </p:txBody>
+      </p:sp>
+      <p:sp>
+        <p:nvSpPr>
+          <p:cNvPr id="4" name="Slide Number Placeholder 3"/>
+          <p:cNvSpPr>
+            <a:spLocks noGrp="1"/>
+          </p:cNvSpPr>
+          <p:nvPr>
+            <p:ph type="sldNum" idx="5" sz="quarter"/>
+          </p:nvPr>
+        </p:nvSpPr>
+        <p:spPr/>
+      </p:sp>
+    </p:spTree>
+  </p:cSld>
+  <p:clrMapOvr>
+    <a:masterClrMapping/>
+  </p:clrMapOvr>
+</p:notes>
+</file>
+
+<file path=ppt/notesSlides/notesSlide13.xml><?xml version="1.0" encoding="utf-8"?>
+<p:notes xmlns:a="http://schemas.openxmlformats.org/drawingml/2006/main" xmlns:p="http://schemas.openxmlformats.org/presentationml/2006/main" xmlns:r="http://schemas.openxmlformats.org/officeDocument/2006/relationships">
+  <p:cSld>
+    <p:spTree>
+      <p:nvGrpSpPr>
+        <p:cNvPr id="1" name=""/>
+        <p:cNvGrpSpPr/>
+        <p:nvPr/>
+      </p:nvGrpSpPr>
+      <p:grpSpPr>
+        <a:xfrm>
+          <a:off x="0" y="0"/>
+          <a:ext cx="0" cy="0"/>
+          <a:chOff x="0" y="0"/>
+          <a:chExt cx="0" cy="0"/>
+        </a:xfrm>
+      </p:grpSpPr>
+      <p:sp>
+        <p:nvSpPr>
+          <p:cNvPr id="2" name="Slide Image Placeholder 1"/>
+          <p:cNvSpPr>
+            <a:spLocks noGrp="1"/>
+          </p:cNvSpPr>
+          <p:nvPr>
+            <p:ph type="sldImg" idx="2"/>
+          </p:nvPr>
+        </p:nvSpPr>
+        <p:spPr/>
+      </p:sp>
+      <p:sp>
+        <p:nvSpPr>
+          <p:cNvPr id="3" name="Notes Placeholder 2"/>
+          <p:cNvSpPr>
+            <a:spLocks noGrp="1"/>
+          </p:cNvSpPr>
+          <p:nvPr>
+            <p:ph type="body" idx="3" sz="quarter"/>
+          </p:nvPr>
+        </p:nvSpPr>
+        <p:spPr/>
+        <p:txBody>
+          <a:bodyPr/>
+          <a:lstStyle/>
+          <a:p>
+            <a:r>
+              <a:t>Краен слайд. Споменете, че материалите са под свободен лиценз CC-BY-NC-SA. Насочете учениците към https://it-kariera.mon.bg за допълнителни ресурси.</a:t>
+            </a:r>
+          </a:p>
+        </p:txBody>
+      </p:sp>
+      <p:sp>
+        <p:nvSpPr>
+          <p:cNvPr id="4" name="Slide Number Placeholder 3"/>
+          <p:cNvSpPr>
+            <a:spLocks noGrp="1"/>
+          </p:cNvSpPr>
+          <p:nvPr>
+            <p:ph type="sldNum" idx="5" sz="quarter"/>
+          </p:nvPr>
+        </p:nvSpPr>
+        <p:spPr/>
+      </p:sp>
+    </p:spTree>
+  </p:cSld>
+  <p:clrMapOvr>
+    <a:masterClrMapping/>
+  </p:clrMapOvr>
+</p:notes>
+</file>
+
+<file path=ppt/notesSlides/notesSlide14.xml><?xml version="1.0" encoding="utf-8"?>
+<p:notes xmlns:a="http://schemas.openxmlformats.org/drawingml/2006/main" xmlns:p="http://schemas.openxmlformats.org/presentationml/2006/main" xmlns:r="http://schemas.openxmlformats.org/officeDocument/2006/relationships">
+  <p:cSld>
+    <p:spTree>
+      <p:nvGrpSpPr>
+        <p:cNvPr id="1" name=""/>
+        <p:cNvGrpSpPr/>
+        <p:nvPr/>
+      </p:nvGrpSpPr>
+      <p:grpSpPr>
+        <a:xfrm>
+          <a:off x="0" y="0"/>
+          <a:ext cx="0" cy="0"/>
+          <a:chOff x="0" y="0"/>
+          <a:chExt cx="0" cy="0"/>
+        </a:xfrm>
+      </p:grpSpPr>
+      <p:sp>
+        <p:nvSpPr>
+          <p:cNvPr id="2" name="Slide Image Placeholder 1"/>
+          <p:cNvSpPr>
+            <a:spLocks noGrp="1"/>
+          </p:cNvSpPr>
+          <p:nvPr>
+            <p:ph type="sldImg" idx="2"/>
+          </p:nvPr>
+        </p:nvSpPr>
+        <p:spPr/>
+      </p:sp>
+      <p:sp>
+        <p:nvSpPr>
+          <p:cNvPr id="3" name="Notes Placeholder 2"/>
+          <p:cNvSpPr>
+            <a:spLocks noGrp="1"/>
+          </p:cNvSpPr>
+          <p:nvPr>
+            <p:ph type="body" idx="3" sz="quarter"/>
+          </p:nvPr>
+        </p:nvSpPr>
+        <p:spPr/>
+        <p:txBody>
+          <a:bodyPr/>
+          <a:lstStyle/>
+          <a:p>
+            <a:r>
+              <a:t>МОТИВАЦИЯ — Ключов слайд!</a:t>
+            </a:r>
+          </a:p>
+          <a:p>
+            <a:r>
+              <a:t>Покажете двата варианта на код един до друг. Подчертайте: LINQ кодът е по-четим, по-кратък и по-малко подложен на грешки.</a:t>
+            </a:r>
+          </a:p>
+          <a:p>
+            <a:r>
+              <a:t>Аналогия: LINQ е като SQL за колекции в паметта.</a:t>
+            </a:r>
+          </a:p>
+          <a:p>
+            <a:r>
+              <a:t>Запитайте учениците: 'Кой от двата варианта бихте предпочели да поддържате след 6 месеца?'</a:t>
+            </a:r>
+          </a:p>
+          <a:p>
+            <a:r>
+              <a:t>LINQ се използва навсякъде: Entity Framework (бази данни), обработка на JSON, филтриране на UI списъци, game dev (Unity), анализ на данни.</a:t>
+            </a:r>
+          </a:p>
+        </p:txBody>
+      </p:sp>
+      <p:sp>
+        <p:nvSpPr>
+          <p:cNvPr id="4" name="Slide Number Placeholder 3"/>
+          <p:cNvSpPr>
+            <a:spLocks noGrp="1"/>
+          </p:cNvSpPr>
+          <p:nvPr>
+            <p:ph type="sldNum" idx="5" sz="quarter"/>
+          </p:nvPr>
+        </p:nvSpPr>
+        <p:spPr/>
+      </p:sp>
+    </p:spTree>
+  </p:cSld>
+  <p:clrMapOvr>
+    <a:masterClrMapping/>
+  </p:clrMapOvr>
+</p:notes>
+</file>
+
+<file path=ppt/notesSlides/notesSlide15.xml><?xml version="1.0" encoding="utf-8"?>
+<p:notes xmlns:a="http://schemas.openxmlformats.org/drawingml/2006/main" xmlns:p="http://schemas.openxmlformats.org/presentationml/2006/main" xmlns:r="http://schemas.openxmlformats.org/officeDocument/2006/relationships">
+  <p:cSld>
+    <p:spTree>
+      <p:nvGrpSpPr>
+        <p:cNvPr id="1" name=""/>
+        <p:cNvGrpSpPr/>
+        <p:nvPr/>
+      </p:nvGrpSpPr>
+      <p:grpSpPr>
+        <a:xfrm>
+          <a:off x="0" y="0"/>
+          <a:ext cx="0" cy="0"/>
+          <a:chOff x="0" y="0"/>
+          <a:chExt cx="0" cy="0"/>
+        </a:xfrm>
+      </p:grpSpPr>
+      <p:sp>
+        <p:nvSpPr>
+          <p:cNvPr id="2" name="Slide Image Placeholder 1"/>
+          <p:cNvSpPr>
+            <a:spLocks noGrp="1"/>
+          </p:cNvSpPr>
+          <p:nvPr>
+            <p:ph type="sldImg" idx="2"/>
+          </p:nvPr>
+        </p:nvSpPr>
+        <p:spPr/>
+      </p:sp>
+      <p:sp>
+        <p:nvSpPr>
+          <p:cNvPr id="3" name="Notes Placeholder 2"/>
+          <p:cNvSpPr>
+            <a:spLocks noGrp="1"/>
+          </p:cNvSpPr>
+          <p:nvPr>
+            <p:ph type="body" idx="3" sz="quarter"/>
+          </p:nvPr>
+        </p:nvSpPr>
+        <p:spPr/>
+        <p:txBody>
+          <a:bodyPr/>
+          <a:lstStyle/>
+          <a:p>
+            <a:r>
+              <a:t>Select() = 'проектирай всеки елемент към нещо друго'.</a:t>
+            </a:r>
+          </a:p>
+          <a:p>
+            <a:r>
+              <a:t>Аналогия с Excel: представете си колона с числа — Select е като да добавите нова колона с формула.</a:t>
+            </a:r>
+          </a:p>
+          <a:p>
+            <a:r>
+              <a:t>Select НЕ филтрира — само трансформира. Ако искате и двете: Where() + Select().</a:t>
+            </a:r>
+          </a:p>
+          <a:p>
+            <a:r>
+              <a:t>Версията с два параметъра Select((x, i) =&gt; ...) е много полезна когато трябва и индексът на елемента.</a:t>
+            </a:r>
+          </a:p>
+          <a:p>
+            <a:r>
+              <a:t>Задача за учениците: прочетете имена, изведете ги с главна първа буква (ToUpper на първия символ + Substring(1)).</a:t>
+            </a:r>
+          </a:p>
+        </p:txBody>
+      </p:sp>
+      <p:sp>
+        <p:nvSpPr>
+          <p:cNvPr id="4" name="Slide Number Placeholder 3"/>
+          <p:cNvSpPr>
+            <a:spLocks noGrp="1"/>
+          </p:cNvSpPr>
+          <p:nvPr>
+            <p:ph type="sldNum" idx="5" sz="quarter"/>
+          </p:nvPr>
+        </p:nvSpPr>
+        <p:spPr/>
+      </p:sp>
+    </p:spTree>
+  </p:cSld>
+  <p:clrMapOvr>
+    <a:masterClrMapping/>
+  </p:clrMapOvr>
+</p:notes>
+</file>
+
+<file path=ppt/notesSlides/notesSlide16.xml><?xml version="1.0" encoding="utf-8"?>
+<p:notes xmlns:a="http://schemas.openxmlformats.org/drawingml/2006/main" xmlns:p="http://schemas.openxmlformats.org/presentationml/2006/main" xmlns:r="http://schemas.openxmlformats.org/officeDocument/2006/relationships">
+  <p:cSld>
+    <p:spTree>
+      <p:nvGrpSpPr>
+        <p:cNvPr id="1" name=""/>
+        <p:cNvGrpSpPr/>
+        <p:nvPr/>
+      </p:nvGrpSpPr>
+      <p:grpSpPr>
+        <a:xfrm>
+          <a:off x="0" y="0"/>
+          <a:ext cx="0" cy="0"/>
+          <a:chOff x="0" y="0"/>
+          <a:chExt cx="0" cy="0"/>
+        </a:xfrm>
+      </p:grpSpPr>
+      <p:sp>
+        <p:nvSpPr>
+          <p:cNvPr id="2" name="Slide Image Placeholder 1"/>
+          <p:cNvSpPr>
+            <a:spLocks noGrp="1"/>
+          </p:cNvSpPr>
+          <p:nvPr>
+            <p:ph type="sldImg" idx="2"/>
+          </p:nvPr>
+        </p:nvSpPr>
+        <p:spPr/>
+      </p:sp>
+      <p:sp>
+        <p:nvSpPr>
+          <p:cNvPr id="3" name="Notes Placeholder 2"/>
+          <p:cNvSpPr>
+            <a:spLocks noGrp="1"/>
+          </p:cNvSpPr>
+          <p:nvPr>
+            <p:ph type="body" idx="3" sz="quarter"/>
+          </p:nvPr>
+        </p:nvSpPr>
+        <p:spPr/>
+        <p:txBody>
+          <a:bodyPr/>
+          <a:lstStyle/>
+          <a:p>
+            <a:r>
+              <a:t>Тези методи са еквивалентни на SUM/MIN/MAX/AVG в SQL.</a:t>
+            </a:r>
+          </a:p>
+          <a:p>
+            <a:r>
+              <a:t>Важно: Sum(), Max(), Min(), Average() хвърлят InvalidOperationException ако колекцията е празна!</a:t>
+            </a:r>
+          </a:p>
+          <a:p>
+            <a:r>
+              <a:t>Безопасна алтернатива: DefaultIfEmpty() преди агрегатния метод, или проверка Any() преди извикването.</a:t>
+            </a:r>
+          </a:p>
+          <a:p>
+            <a:r>
+              <a:t>Пример от реалния свят: изчисляване на тотал в пазарска кошница, средна оценка, макс. температура за деня.</a:t>
+            </a:r>
+          </a:p>
+          <a:p>
+            <a:r>
+              <a:t>Задача за учениците: прочетете оценки, намерете средната, броя под средното и броя над средното — само с LINQ.</a:t>
+            </a:r>
+          </a:p>
+        </p:txBody>
+      </p:sp>
+      <p:sp>
+        <p:nvSpPr>
+          <p:cNvPr id="4" name="Slide Number Placeholder 3"/>
+          <p:cNvSpPr>
+            <a:spLocks noGrp="1"/>
+          </p:cNvSpPr>
+          <p:nvPr>
+            <p:ph type="sldNum" idx="5" sz="quarter"/>
+          </p:nvPr>
+        </p:nvSpPr>
+        <p:spPr/>
+      </p:sp>
+    </p:spTree>
+  </p:cSld>
+  <p:clrMapOvr>
+    <a:masterClrMapping/>
+  </p:clrMapOvr>
+</p:notes>
+</file>
+
+<file path=ppt/notesSlides/notesSlide17.xml><?xml version="1.0" encoding="utf-8"?>
+<p:notes xmlns:a="http://schemas.openxmlformats.org/drawingml/2006/main" xmlns:p="http://schemas.openxmlformats.org/presentationml/2006/main" xmlns:r="http://schemas.openxmlformats.org/officeDocument/2006/relationships">
+  <p:cSld>
+    <p:spTree>
+      <p:nvGrpSpPr>
+        <p:cNvPr id="1" name=""/>
+        <p:cNvGrpSpPr/>
+        <p:nvPr/>
+      </p:nvGrpSpPr>
+      <p:grpSpPr>
+        <a:xfrm>
+          <a:off x="0" y="0"/>
+          <a:ext cx="0" cy="0"/>
+          <a:chOff x="0" y="0"/>
+          <a:chExt cx="0" cy="0"/>
+        </a:xfrm>
+      </p:grpSpPr>
+      <p:sp>
+        <p:nvSpPr>
+          <p:cNvPr id="2" name="Slide Image Placeholder 1"/>
+          <p:cNvSpPr>
+            <a:spLocks noGrp="1"/>
+          </p:cNvSpPr>
+          <p:nvPr>
+            <p:ph type="sldImg" idx="2"/>
+          </p:nvPr>
+        </p:nvSpPr>
+        <p:spPr/>
+      </p:sp>
+      <p:sp>
+        <p:nvSpPr>
+          <p:cNvPr id="3" name="Notes Placeholder 2"/>
+          <p:cNvSpPr>
+            <a:spLocks noGrp="1"/>
+          </p:cNvSpPr>
+          <p:nvPr>
+            <p:ph type="body" idx="3" sz="quarter"/>
+          </p:nvPr>
+        </p:nvSpPr>
+        <p:spPr/>
+        <p:txBody>
+          <a:bodyPr/>
+          <a:lstStyle/>
+          <a:p>
+            <a:r>
+              <a:t>Any() и All() са квантори (от логиката: съществуващ и универсален квантор — ∃ и ∀).</a:t>
+            </a:r>
+          </a:p>
+          <a:p>
+            <a:r>
+              <a:t>Any() без параметър е по-ефективно от .Count() &gt; 0 — спира при първия елемент.</a:t>
+            </a:r>
+          </a:p>
+          <a:p>
+            <a:r>
+              <a:t>Типичен случай на грешка: извикване на Average() на празна колекция → изключение. Използвайте Any() преди това.</a:t>
+            </a:r>
+          </a:p>
+          <a:p>
+            <a:r>
+              <a:t>All() на празна колекция връща TRUE (vacuous truth) — внимавайте!</a:t>
+            </a:r>
+          </a:p>
+          <a:p>
+            <a:r>
+              <a:t>Реален пример: Any(u =&gt; u.IsAdmin) — проверка дали има поне един администратор в системата.</a:t>
+            </a:r>
+          </a:p>
+        </p:txBody>
+      </p:sp>
+      <p:sp>
+        <p:nvSpPr>
+          <p:cNvPr id="4" name="Slide Number Placeholder 3"/>
+          <p:cNvSpPr>
+            <a:spLocks noGrp="1"/>
+          </p:cNvSpPr>
+          <p:nvPr>
+            <p:ph type="sldNum" idx="5" sz="quarter"/>
+          </p:nvPr>
+        </p:nvSpPr>
+        <p:spPr/>
+      </p:sp>
+    </p:spTree>
+  </p:cSld>
+  <p:clrMapOvr>
+    <a:masterClrMapping/>
+  </p:clrMapOvr>
+</p:notes>
+</file>
+
+<file path=ppt/notesSlides/notesSlide18.xml><?xml version="1.0" encoding="utf-8"?>
+<p:notes xmlns:a="http://schemas.openxmlformats.org/drawingml/2006/main" xmlns:p="http://schemas.openxmlformats.org/presentationml/2006/main" xmlns:r="http://schemas.openxmlformats.org/officeDocument/2006/relationships">
+  <p:cSld>
+    <p:spTree>
+      <p:nvGrpSpPr>
+        <p:cNvPr id="1" name=""/>
+        <p:cNvGrpSpPr/>
+        <p:nvPr/>
+      </p:nvGrpSpPr>
+      <p:grpSpPr>
+        <a:xfrm>
+          <a:off x="0" y="0"/>
+          <a:ext cx="0" cy="0"/>
+          <a:chOff x="0" y="0"/>
+          <a:chExt cx="0" cy="0"/>
+        </a:xfrm>
+      </p:grpSpPr>
+      <p:sp>
+        <p:nvSpPr>
+          <p:cNvPr id="2" name="Slide Image Placeholder 1"/>
+          <p:cNvSpPr>
+            <a:spLocks noGrp="1"/>
+          </p:cNvSpPr>
+          <p:nvPr>
+            <p:ph type="sldImg" idx="2"/>
+          </p:nvPr>
+        </p:nvSpPr>
+        <p:spPr/>
+      </p:sp>
+      <p:sp>
+        <p:nvSpPr>
+          <p:cNvPr id="3" name="Notes Placeholder 2"/>
+          <p:cNvSpPr>
+            <a:spLocks noGrp="1"/>
+          </p:cNvSpPr>
+          <p:nvPr>
+            <p:ph type="body" idx="3" sz="quarter"/>
+          </p:nvPr>
+        </p:nvSpPr>
+        <p:spPr/>
+        <p:txBody>
+          <a:bodyPr/>
+          <a:lstStyle/>
+          <a:p>
+            <a:r>
+              <a:t>Skip и Take са основата на пагинацията (страниране) — използват се навсякъде: уеб сайтове, мобилни приложения, бази данни.</a:t>
+            </a:r>
+          </a:p>
+          <a:p>
+            <a:r>
+              <a:t>Формулата за пагинация: Skip(page * pageSize).Take(pageSize) — запомнете я!</a:t>
+            </a:r>
+          </a:p>
+          <a:p>
+            <a:r>
+              <a:t>SkipWhile и TakeWhile — вариации, които спират при определено условие.</a:t>
+            </a:r>
+          </a:p>
+          <a:p>
+            <a:r>
+              <a:t>Реален пример: инстаграм feed — зарежда се по 20 поста. При scroll надолу се прилага Skip(20 * n).Take(20).</a:t>
+            </a:r>
+          </a:p>
+          <a:p>
+            <a:r>
+              <a:t>Задача: масив от 100 числа, изведете елементите от позиция 10 до 20 само с LINQ.</a:t>
+            </a:r>
+          </a:p>
+        </p:txBody>
+      </p:sp>
+      <p:sp>
+        <p:nvSpPr>
+          <p:cNvPr id="4" name="Slide Number Placeholder 3"/>
+          <p:cNvSpPr>
+            <a:spLocks noGrp="1"/>
+          </p:cNvSpPr>
+          <p:nvPr>
+            <p:ph type="sldNum" idx="5" sz="quarter"/>
+          </p:nvPr>
+        </p:nvSpPr>
+        <p:spPr/>
+      </p:sp>
+    </p:spTree>
+  </p:cSld>
+  <p:clrMapOvr>
+    <a:masterClrMapping/>
+  </p:clrMapOvr>
+</p:notes>
+</file>
+
+<file path=ppt/notesSlides/notesSlide19.xml><?xml version="1.0" encoding="utf-8"?>
+<p:notes xmlns:a="http://schemas.openxmlformats.org/drawingml/2006/main" xmlns:p="http://schemas.openxmlformats.org/presentationml/2006/main" xmlns:r="http://schemas.openxmlformats.org/officeDocument/2006/relationships">
+  <p:cSld>
+    <p:spTree>
+      <p:nvGrpSpPr>
+        <p:cNvPr id="1" name=""/>
+        <p:cNvGrpSpPr/>
+        <p:nvPr/>
+      </p:nvGrpSpPr>
+      <p:grpSpPr>
+        <a:xfrm>
+          <a:off x="0" y="0"/>
+          <a:ext cx="0" cy="0"/>
+          <a:chOff x="0" y="0"/>
+          <a:chExt cx="0" cy="0"/>
+        </a:xfrm>
+      </p:grpSpPr>
+      <p:sp>
+        <p:nvSpPr>
+          <p:cNvPr id="2" name="Slide Image Placeholder 1"/>
+          <p:cNvSpPr>
+            <a:spLocks noGrp="1"/>
+          </p:cNvSpPr>
+          <p:nvPr>
+            <p:ph type="sldImg" idx="2"/>
+          </p:nvPr>
+        </p:nvSpPr>
+        <p:spPr/>
+      </p:sp>
+      <p:sp>
+        <p:nvSpPr>
+          <p:cNvPr id="3" name="Notes Placeholder 2"/>
+          <p:cNvSpPr>
+            <a:spLocks noGrp="1"/>
+          </p:cNvSpPr>
+          <p:nvPr>
+            <p:ph type="body" idx="3" sz="quarter"/>
+          </p:nvPr>
+        </p:nvSpPr>
+        <p:spPr/>
+        <p:txBody>
+          <a:bodyPr/>
+          <a:lstStyle/>
+          <a:p>
+            <a:r>
+              <a:t>GroupBy е едно от по-сложните LINQ операции — аналогично на GROUP BY в SQL.</a:t>
+            </a:r>
+          </a:p>
+          <a:p>
+            <a:r>
+              <a:t>Резултатът е IEnumerable&lt;IGrouping&lt;TKey, TElement&gt;&gt;. Всяка група има Key (ключа) и е сама по себе си IEnumerable.</a:t>
+            </a:r>
+          </a:p>
+          <a:p>
+            <a:r>
+              <a:t>Реален пример: групиране на студенти по клас, поръчки по дата, продукти по категория.</a:t>
+            </a:r>
+          </a:p>
+          <a:p>
+            <a:r>
+              <a:t>Комбинация: GroupBy + Select + Count() → { key, count } речник — много честа операция.</a:t>
+            </a:r>
+          </a:p>
+          <a:p>
+            <a:r>
+              <a:t>Пример: words.GroupBy(w =&gt; w[0]).Select(g =&gt; new { Letter = g.Key, Count = g.Count() })</a:t>
+            </a:r>
+          </a:p>
+          <a:p>
+            <a:r>
+              <a:t>Задача: прочетете списък от оценки, изведете колко ученика имат всяка оценка.</a:t>
+            </a:r>
+          </a:p>
+        </p:txBody>
+      </p:sp>
+      <p:sp>
+        <p:nvSpPr>
+          <p:cNvPr id="4" name="Slide Number Placeholder 3"/>
+          <p:cNvSpPr>
+            <a:spLocks noGrp="1"/>
+          </p:cNvSpPr>
+          <p:nvPr>
+            <p:ph type="sldNum" idx="5" sz="quarter"/>
+          </p:nvPr>
+        </p:nvSpPr>
+        <p:spPr/>
+      </p:sp>
+    </p:spTree>
   </p:cSld>
   <p:clrMapOvr>
     <a:masterClrMapping/>
@@ -719,7 +1553,9 @@
           <a:bodyPr/>
           <a:lstStyle/>
           <a:p>
-            <a:endParaRPr lang="bg-BG"/>
+            <a:r>
+              <a:t>Обобщете с въпроси: 'Кой метод използваме за филтриране? За сортиране? За уникалност?' Насочете учениците към официалната документация на Microsoft и SoftUni Judge за практика.</a:t>
+            </a:r>
           </a:p>
         </p:txBody>
       </p:sp>
@@ -804,6 +1640,586 @@
         <p14:creationId xmlns:p14="http://schemas.microsoft.com/office/powerpoint/2010/main" val="3059439210"/>
       </p:ext>
     </p:extLst>
+  </p:cSld>
+  <p:clrMapOvr>
+    <a:masterClrMapping/>
+  </p:clrMapOvr>
+</p:notes>
+</file>
+
+<file path=ppt/notesSlides/notesSlide20.xml><?xml version="1.0" encoding="utf-8"?>
+<p:notes xmlns:a="http://schemas.openxmlformats.org/drawingml/2006/main" xmlns:p="http://schemas.openxmlformats.org/presentationml/2006/main" xmlns:r="http://schemas.openxmlformats.org/officeDocument/2006/relationships">
+  <p:cSld>
+    <p:spTree>
+      <p:nvGrpSpPr>
+        <p:cNvPr id="1" name=""/>
+        <p:cNvGrpSpPr/>
+        <p:nvPr/>
+      </p:nvGrpSpPr>
+      <p:grpSpPr>
+        <a:xfrm>
+          <a:off x="0" y="0"/>
+          <a:ext cx="0" cy="0"/>
+          <a:chOff x="0" y="0"/>
+          <a:chExt cx="0" cy="0"/>
+        </a:xfrm>
+      </p:grpSpPr>
+      <p:sp>
+        <p:nvSpPr>
+          <p:cNvPr id="2" name="Slide Image Placeholder 1"/>
+          <p:cNvSpPr>
+            <a:spLocks noGrp="1"/>
+          </p:cNvSpPr>
+          <p:nvPr>
+            <p:ph type="sldImg" idx="2"/>
+          </p:nvPr>
+        </p:nvSpPr>
+        <p:spPr/>
+      </p:sp>
+      <p:sp>
+        <p:nvSpPr>
+          <p:cNvPr id="3" name="Notes Placeholder 2"/>
+          <p:cNvSpPr>
+            <a:spLocks noGrp="1"/>
+          </p:cNvSpPr>
+          <p:nvPr>
+            <p:ph type="body" idx="3" sz="quarter"/>
+          </p:nvPr>
+        </p:nvSpPr>
+        <p:spPr/>
+        <p:txBody>
+          <a:bodyPr/>
+          <a:lstStyle/>
+          <a:p>
+            <a:r>
+              <a:t>Веригата от методи е сърцето на LINQ стила.</a:t>
+            </a:r>
+          </a:p>
+          <a:p>
+            <a:r>
+              <a:t>Важно: редът има значение! Where преди OrderBy е по-ефективно (сортираме по-малко елементи).</a:t>
+            </a:r>
+          </a:p>
+          <a:p>
+            <a:r>
+              <a:t>Lazy evaluation (отложено изпълнение): LINQ не изпълнява заявката докато не обходите резултата (foreach, ToArray, ToList).</a:t>
+            </a:r>
+          </a:p>
+          <a:p>
+            <a:r>
+              <a:t>Добра практика: ToArray() или ToList() в края ако ще ползвате резултата многократно — иначе заявката се изпълнява при всяко обхождане.</a:t>
+            </a:r>
+          </a:p>
+          <a:p>
+            <a:r>
+              <a:t>Четимост: наредете методите на отделни редове (всеки .Метод() на нов ред) — много по-четимо от вложени методи.</a:t>
+            </a:r>
+          </a:p>
+        </p:txBody>
+      </p:sp>
+      <p:sp>
+        <p:nvSpPr>
+          <p:cNvPr id="4" name="Slide Number Placeholder 3"/>
+          <p:cNvSpPr>
+            <a:spLocks noGrp="1"/>
+          </p:cNvSpPr>
+          <p:nvPr>
+            <p:ph type="sldNum" idx="5" sz="quarter"/>
+          </p:nvPr>
+        </p:nvSpPr>
+        <p:spPr/>
+      </p:sp>
+    </p:spTree>
+  </p:cSld>
+  <p:clrMapOvr>
+    <a:masterClrMapping/>
+  </p:clrMapOvr>
+</p:notes>
+</file>
+
+<file path=ppt/notesSlides/notesSlide3.xml><?xml version="1.0" encoding="utf-8"?>
+<p:notes xmlns:a="http://schemas.openxmlformats.org/drawingml/2006/main" xmlns:p="http://schemas.openxmlformats.org/presentationml/2006/main" xmlns:r="http://schemas.openxmlformats.org/officeDocument/2006/relationships">
+  <p:cSld>
+    <p:spTree>
+      <p:nvGrpSpPr>
+        <p:cNvPr id="1" name=""/>
+        <p:cNvGrpSpPr/>
+        <p:nvPr/>
+      </p:nvGrpSpPr>
+      <p:grpSpPr>
+        <a:xfrm>
+          <a:off x="0" y="0"/>
+          <a:ext cx="0" cy="0"/>
+          <a:chOff x="0" y="0"/>
+          <a:chExt cx="0" cy="0"/>
+        </a:xfrm>
+      </p:grpSpPr>
+      <p:sp>
+        <p:nvSpPr>
+          <p:cNvPr id="2" name="Slide Image Placeholder 1"/>
+          <p:cNvSpPr>
+            <a:spLocks noGrp="1"/>
+          </p:cNvSpPr>
+          <p:nvPr>
+            <p:ph type="sldImg" idx="2"/>
+          </p:nvPr>
+        </p:nvSpPr>
+        <p:spPr/>
+      </p:sp>
+      <p:sp>
+        <p:nvSpPr>
+          <p:cNvPr id="3" name="Notes Placeholder 2"/>
+          <p:cNvSpPr>
+            <a:spLocks noGrp="1"/>
+          </p:cNvSpPr>
+          <p:nvPr>
+            <p:ph type="body" idx="3" sz="quarter"/>
+          </p:nvPr>
+        </p:nvSpPr>
+        <p:spPr/>
+        <p:txBody>
+          <a:bodyPr/>
+          <a:lstStyle/>
+          <a:p>
+            <a:r>
+              <a:t>Добре дошли! LINQ (Language Integrated Query) е едно от най-мощните нововъведения в C#. Ключово послание: вместо да пишете for-цикли за всяка операция с колекция, LINQ ви дава готови, четими методи. Покажете мотивация — пример без LINQ (10 реда) vs. с LINQ (1 ред).</a:t>
+            </a:r>
+          </a:p>
+        </p:txBody>
+      </p:sp>
+      <p:sp>
+        <p:nvSpPr>
+          <p:cNvPr id="4" name="Slide Number Placeholder 3"/>
+          <p:cNvSpPr>
+            <a:spLocks noGrp="1"/>
+          </p:cNvSpPr>
+          <p:nvPr>
+            <p:ph type="sldNum" idx="5" sz="quarter"/>
+          </p:nvPr>
+        </p:nvSpPr>
+        <p:spPr/>
+      </p:sp>
+    </p:spTree>
+  </p:cSld>
+  <p:clrMapOvr>
+    <a:masterClrMapping/>
+  </p:clrMapOvr>
+</p:notes>
+</file>
+
+<file path=ppt/notesSlides/notesSlide4.xml><?xml version="1.0" encoding="utf-8"?>
+<p:notes xmlns:a="http://schemas.openxmlformats.org/drawingml/2006/main" xmlns:p="http://schemas.openxmlformats.org/presentationml/2006/main" xmlns:r="http://schemas.openxmlformats.org/officeDocument/2006/relationships">
+  <p:cSld>
+    <p:spTree>
+      <p:nvGrpSpPr>
+        <p:cNvPr id="1" name=""/>
+        <p:cNvGrpSpPr/>
+        <p:nvPr/>
+      </p:nvGrpSpPr>
+      <p:grpSpPr>
+        <a:xfrm>
+          <a:off x="0" y="0"/>
+          <a:ext cx="0" cy="0"/>
+          <a:chOff x="0" y="0"/>
+          <a:chExt cx="0" cy="0"/>
+        </a:xfrm>
+      </p:grpSpPr>
+      <p:sp>
+        <p:nvSpPr>
+          <p:cNvPr id="2" name="Slide Image Placeholder 1"/>
+          <p:cNvSpPr>
+            <a:spLocks noGrp="1"/>
+          </p:cNvSpPr>
+          <p:nvPr>
+            <p:ph type="sldImg" idx="2"/>
+          </p:nvPr>
+        </p:nvSpPr>
+        <p:spPr/>
+      </p:sp>
+      <p:sp>
+        <p:nvSpPr>
+          <p:cNvPr id="3" name="Notes Placeholder 2"/>
+          <p:cNvSpPr>
+            <a:spLocks noGrp="1"/>
+          </p:cNvSpPr>
+          <p:nvPr>
+            <p:ph type="body" idx="3" sz="quarter"/>
+          </p:nvPr>
+        </p:nvSpPr>
+        <p:spPr/>
+        <p:txBody>
+          <a:bodyPr/>
+          <a:lstStyle/>
+          <a:p>
+            <a:r>
+              <a:t>Демо: напишете примера на дъската БЕЗ LINQ (for-цикъл с if), след това покажете WHERE версията. Подчертайте: Where = 'вземи само тези, за които условието е вярно'. Count с ламбда = брои без да извличаш. ToArray() е необходим за преобразуване обратно в масив.</a:t>
+            </a:r>
+          </a:p>
+        </p:txBody>
+      </p:sp>
+      <p:sp>
+        <p:nvSpPr>
+          <p:cNvPr id="4" name="Slide Number Placeholder 3"/>
+          <p:cNvSpPr>
+            <a:spLocks noGrp="1"/>
+          </p:cNvSpPr>
+          <p:nvPr>
+            <p:ph type="sldNum" idx="5" sz="quarter"/>
+          </p:nvPr>
+        </p:nvSpPr>
+        <p:spPr/>
+      </p:sp>
+    </p:spTree>
+  </p:cSld>
+  <p:clrMapOvr>
+    <a:masterClrMapping/>
+  </p:clrMapOvr>
+</p:notes>
+</file>
+
+<file path=ppt/notesSlides/notesSlide5.xml><?xml version="1.0" encoding="utf-8"?>
+<p:notes xmlns:a="http://schemas.openxmlformats.org/drawingml/2006/main" xmlns:p="http://schemas.openxmlformats.org/presentationml/2006/main" xmlns:r="http://schemas.openxmlformats.org/officeDocument/2006/relationships">
+  <p:cSld>
+    <p:spTree>
+      <p:nvGrpSpPr>
+        <p:cNvPr id="1" name=""/>
+        <p:cNvGrpSpPr/>
+        <p:nvPr/>
+      </p:nvGrpSpPr>
+      <p:grpSpPr>
+        <a:xfrm>
+          <a:off x="0" y="0"/>
+          <a:ext cx="0" cy="0"/>
+          <a:chOff x="0" y="0"/>
+          <a:chExt cx="0" cy="0"/>
+        </a:xfrm>
+      </p:grpSpPr>
+      <p:sp>
+        <p:nvSpPr>
+          <p:cNvPr id="2" name="Slide Image Placeholder 1"/>
+          <p:cNvSpPr>
+            <a:spLocks noGrp="1"/>
+          </p:cNvSpPr>
+          <p:nvPr>
+            <p:ph type="sldImg" idx="2"/>
+          </p:nvPr>
+        </p:nvSpPr>
+        <p:spPr/>
+      </p:sp>
+      <p:sp>
+        <p:nvSpPr>
+          <p:cNvPr id="3" name="Notes Placeholder 2"/>
+          <p:cNvSpPr>
+            <a:spLocks noGrp="1"/>
+          </p:cNvSpPr>
+          <p:nvPr>
+            <p:ph type="body" idx="3" sz="quarter"/>
+          </p:nvPr>
+        </p:nvSpPr>
+        <p:spPr/>
+        <p:txBody>
+          <a:bodyPr/>
+          <a:lstStyle/>
+          <a:p>
+            <a:r>
+              <a:t>OrderBy сортира нарастващо, OrderByDescending — намаляващо. Take(n) взима първите n елемента. Select трансформира — показва се в следващ слайд подробно. Важно: тези методи НЕ променят оригиналния масив — връщат нов IEnumerable.</a:t>
+            </a:r>
+          </a:p>
+        </p:txBody>
+      </p:sp>
+      <p:sp>
+        <p:nvSpPr>
+          <p:cNvPr id="4" name="Slide Number Placeholder 3"/>
+          <p:cNvSpPr>
+            <a:spLocks noGrp="1"/>
+          </p:cNvSpPr>
+          <p:nvPr>
+            <p:ph type="sldNum" idx="5" sz="quarter"/>
+          </p:nvPr>
+        </p:nvSpPr>
+        <p:spPr/>
+      </p:sp>
+    </p:spTree>
+  </p:cSld>
+  <p:clrMapOvr>
+    <a:masterClrMapping/>
+  </p:clrMapOvr>
+</p:notes>
+</file>
+
+<file path=ppt/notesSlides/notesSlide6.xml><?xml version="1.0" encoding="utf-8"?>
+<p:notes xmlns:a="http://schemas.openxmlformats.org/drawingml/2006/main" xmlns:p="http://schemas.openxmlformats.org/presentationml/2006/main" xmlns:r="http://schemas.openxmlformats.org/officeDocument/2006/relationships">
+  <p:cSld>
+    <p:spTree>
+      <p:nvGrpSpPr>
+        <p:cNvPr id="1" name=""/>
+        <p:cNvGrpSpPr/>
+        <p:nvPr/>
+      </p:nvGrpSpPr>
+      <p:grpSpPr>
+        <a:xfrm>
+          <a:off x="0" y="0"/>
+          <a:ext cx="0" cy="0"/>
+          <a:chOff x="0" y="0"/>
+          <a:chExt cx="0" cy="0"/>
+        </a:xfrm>
+      </p:grpSpPr>
+      <p:sp>
+        <p:nvSpPr>
+          <p:cNvPr id="2" name="Slide Image Placeholder 1"/>
+          <p:cNvSpPr>
+            <a:spLocks noGrp="1"/>
+          </p:cNvSpPr>
+          <p:nvPr>
+            <p:ph type="sldImg" idx="2"/>
+          </p:nvPr>
+        </p:nvSpPr>
+        <p:spPr/>
+      </p:sp>
+      <p:sp>
+        <p:nvSpPr>
+          <p:cNvPr id="3" name="Notes Placeholder 2"/>
+          <p:cNvSpPr>
+            <a:spLocks noGrp="1"/>
+          </p:cNvSpPr>
+          <p:nvPr>
+            <p:ph type="body" idx="3" sz="quarter"/>
+          </p:nvPr>
+        </p:nvSpPr>
+        <p:spPr/>
+        <p:txBody>
+          <a:bodyPr/>
+          <a:lstStyle/>
+          <a:p>
+            <a:r>
+              <a:t>Distinct е изключително полезен при обработка на потребителски данни (дублирани записи). Покажете аналогията с множества от математиката. Внимание: редът на елементите след Distinct не е гарантиран.</a:t>
+            </a:r>
+          </a:p>
+        </p:txBody>
+      </p:sp>
+      <p:sp>
+        <p:nvSpPr>
+          <p:cNvPr id="4" name="Slide Number Placeholder 3"/>
+          <p:cNvSpPr>
+            <a:spLocks noGrp="1"/>
+          </p:cNvSpPr>
+          <p:nvPr>
+            <p:ph type="sldNum" idx="5" sz="quarter"/>
+          </p:nvPr>
+        </p:nvSpPr>
+        <p:spPr/>
+      </p:sp>
+    </p:spTree>
+  </p:cSld>
+  <p:clrMapOvr>
+    <a:masterClrMapping/>
+  </p:clrMapOvr>
+</p:notes>
+</file>
+
+<file path=ppt/notesSlides/notesSlide7.xml><?xml version="1.0" encoding="utf-8"?>
+<p:notes xmlns:a="http://schemas.openxmlformats.org/drawingml/2006/main" xmlns:p="http://schemas.openxmlformats.org/presentationml/2006/main" xmlns:r="http://schemas.openxmlformats.org/officeDocument/2006/relationships">
+  <p:cSld>
+    <p:spTree>
+      <p:nvGrpSpPr>
+        <p:cNvPr id="1" name=""/>
+        <p:cNvGrpSpPr/>
+        <p:nvPr/>
+      </p:nvGrpSpPr>
+      <p:grpSpPr>
+        <a:xfrm>
+          <a:off x="0" y="0"/>
+          <a:ext cx="0" cy="0"/>
+          <a:chOff x="0" y="0"/>
+          <a:chExt cx="0" cy="0"/>
+        </a:xfrm>
+      </p:grpSpPr>
+      <p:sp>
+        <p:nvSpPr>
+          <p:cNvPr id="2" name="Slide Image Placeholder 1"/>
+          <p:cNvSpPr>
+            <a:spLocks noGrp="1"/>
+          </p:cNvSpPr>
+          <p:nvPr>
+            <p:ph type="sldImg" idx="2"/>
+          </p:nvPr>
+        </p:nvSpPr>
+        <p:spPr/>
+      </p:sp>
+      <p:sp>
+        <p:nvSpPr>
+          <p:cNvPr id="3" name="Notes Placeholder 2"/>
+          <p:cNvSpPr>
+            <a:spLocks noGrp="1"/>
+          </p:cNvSpPr>
+          <p:nvPr>
+            <p:ph type="body" idx="3" sz="quarter"/>
+          </p:nvPr>
+        </p:nvSpPr>
+        <p:spPr/>
+        <p:txBody>
+          <a:bodyPr/>
+          <a:lstStyle/>
+          <a:p>
+            <a:r>
+              <a:t>Дайте 5 минути на учениците сами да прочетат условието. Ключови стъпки: Split по масив от разделители, ToLower, Where за дължина, OrderBy, Distinct. Напомнете: string.Split може да приема char[].</a:t>
+            </a:r>
+          </a:p>
+        </p:txBody>
+      </p:sp>
+      <p:sp>
+        <p:nvSpPr>
+          <p:cNvPr id="4" name="Slide Number Placeholder 3"/>
+          <p:cNvSpPr>
+            <a:spLocks noGrp="1"/>
+          </p:cNvSpPr>
+          <p:nvPr>
+            <p:ph type="sldNum" idx="5" sz="quarter"/>
+          </p:nvPr>
+        </p:nvSpPr>
+        <p:spPr/>
+      </p:sp>
+    </p:spTree>
+  </p:cSld>
+  <p:clrMapOvr>
+    <a:masterClrMapping/>
+  </p:clrMapOvr>
+</p:notes>
+</file>
+
+<file path=ppt/notesSlides/notesSlide8.xml><?xml version="1.0" encoding="utf-8"?>
+<p:notes xmlns:a="http://schemas.openxmlformats.org/drawingml/2006/main" xmlns:p="http://schemas.openxmlformats.org/presentationml/2006/main" xmlns:r="http://schemas.openxmlformats.org/officeDocument/2006/relationships">
+  <p:cSld>
+    <p:spTree>
+      <p:nvGrpSpPr>
+        <p:cNvPr id="1" name=""/>
+        <p:cNvGrpSpPr/>
+        <p:nvPr/>
+      </p:nvGrpSpPr>
+      <p:grpSpPr>
+        <a:xfrm>
+          <a:off x="0" y="0"/>
+          <a:ext cx="0" cy="0"/>
+          <a:chOff x="0" y="0"/>
+          <a:chExt cx="0" cy="0"/>
+        </a:xfrm>
+      </p:grpSpPr>
+      <p:sp>
+        <p:nvSpPr>
+          <p:cNvPr id="2" name="Slide Image Placeholder 1"/>
+          <p:cNvSpPr>
+            <a:spLocks noGrp="1"/>
+          </p:cNvSpPr>
+          <p:nvPr>
+            <p:ph type="sldImg" idx="2"/>
+          </p:nvPr>
+        </p:nvSpPr>
+        <p:spPr/>
+      </p:sp>
+      <p:sp>
+        <p:nvSpPr>
+          <p:cNvPr id="3" name="Notes Placeholder 2"/>
+          <p:cNvSpPr>
+            <a:spLocks noGrp="1"/>
+          </p:cNvSpPr>
+          <p:nvPr>
+            <p:ph type="body" idx="3" sz="quarter"/>
+          </p:nvPr>
+        </p:nvSpPr>
+        <p:spPr/>
+        <p:txBody>
+          <a:bodyPr/>
+          <a:lstStyle/>
+          <a:p>
+            <a:r>
+              <a:t>Обяснете ред по ред. Специално внимание на: ToLower преди Split (за case-insensitive). TODO-то в кода е умишлено — учениците трябва да добавят Where(w =&gt; w.Length &lt; 5). Пуснете учениците да довършат решението сами.</a:t>
+            </a:r>
+          </a:p>
+        </p:txBody>
+      </p:sp>
+      <p:sp>
+        <p:nvSpPr>
+          <p:cNvPr id="4" name="Slide Number Placeholder 3"/>
+          <p:cNvSpPr>
+            <a:spLocks noGrp="1"/>
+          </p:cNvSpPr>
+          <p:nvPr>
+            <p:ph type="sldNum" idx="5" sz="quarter"/>
+          </p:nvPr>
+        </p:nvSpPr>
+        <p:spPr/>
+      </p:sp>
+    </p:spTree>
+  </p:cSld>
+  <p:clrMapOvr>
+    <a:masterClrMapping/>
+  </p:clrMapOvr>
+</p:notes>
+</file>
+
+<file path=ppt/notesSlides/notesSlide9.xml><?xml version="1.0" encoding="utf-8"?>
+<p:notes xmlns:a="http://schemas.openxmlformats.org/drawingml/2006/main" xmlns:p="http://schemas.openxmlformats.org/presentationml/2006/main" xmlns:r="http://schemas.openxmlformats.org/officeDocument/2006/relationships">
+  <p:cSld>
+    <p:spTree>
+      <p:nvGrpSpPr>
+        <p:cNvPr id="1" name=""/>
+        <p:cNvGrpSpPr/>
+        <p:nvPr/>
+      </p:nvGrpSpPr>
+      <p:grpSpPr>
+        <a:xfrm>
+          <a:off x="0" y="0"/>
+          <a:ext cx="0" cy="0"/>
+          <a:chOff x="0" y="0"/>
+          <a:chExt cx="0" cy="0"/>
+        </a:xfrm>
+      </p:grpSpPr>
+      <p:sp>
+        <p:nvSpPr>
+          <p:cNvPr id="2" name="Slide Image Placeholder 1"/>
+          <p:cNvSpPr>
+            <a:spLocks noGrp="1"/>
+          </p:cNvSpPr>
+          <p:nvPr>
+            <p:ph type="sldImg" idx="2"/>
+          </p:nvPr>
+        </p:nvSpPr>
+        <p:spPr/>
+      </p:sp>
+      <p:sp>
+        <p:nvSpPr>
+          <p:cNvPr id="3" name="Notes Placeholder 2"/>
+          <p:cNvSpPr>
+            <a:spLocks noGrp="1"/>
+          </p:cNvSpPr>
+          <p:nvPr>
+            <p:ph type="body" idx="3" sz="quarter"/>
+          </p:nvPr>
+        </p:nvSpPr>
+        <p:spPr/>
+        <p:txBody>
+          <a:bodyPr/>
+          <a:lstStyle/>
+          <a:p>
+            <a:r>
+              <a:t>First() хвърля изключение ако няма елемент — за разлика от FirstOrDefault() което връща default. Single() хвърля изключение ако има повече от един съвпадащ елемент. Препоръка: в production code почти винаги ползвайте FirstOrDefault вместо First.</a:t>
+            </a:r>
+          </a:p>
+        </p:txBody>
+      </p:sp>
+      <p:sp>
+        <p:nvSpPr>
+          <p:cNvPr id="4" name="Slide Number Placeholder 3"/>
+          <p:cNvSpPr>
+            <a:spLocks noGrp="1"/>
+          </p:cNvSpPr>
+          <p:nvPr>
+            <p:ph type="sldNum" idx="5" sz="quarter"/>
+          </p:nvPr>
+        </p:nvSpPr>
+        <p:spPr/>
+      </p:sp>
+    </p:spTree>
   </p:cSld>
   <p:clrMapOvr>
     <a:masterClrMapping/>
@@ -7049,6 +8465,1999 @@
 </p:sld>
 </file>
 
+<file path=ppt/slides/slide14.xml><?xml version="1.0" encoding="utf-8"?>
+<p:sld xmlns:a="http://schemas.openxmlformats.org/drawingml/2006/main" xmlns:p="http://schemas.openxmlformats.org/presentationml/2006/main" xmlns:r="http://schemas.openxmlformats.org/officeDocument/2006/relationships">
+  <p:cSld>
+    <p:bg>
+      <p:bgPr>
+        <a:solidFill>
+          <a:srgbClr val="FFFFFF"/>
+        </a:solidFill>
+        <a:effectLst/>
+      </p:bgPr>
+    </p:bg>
+    <p:spTree>
+      <p:nvGrpSpPr>
+        <p:cNvPr id="1" name=""/>
+        <p:cNvGrpSpPr/>
+        <p:nvPr/>
+      </p:nvGrpSpPr>
+      <p:grpSpPr/>
+      <p:sp>
+        <p:nvSpPr>
+          <p:cNvPr id="2" name="TextBox 1"/>
+          <p:cNvSpPr txBox="1"/>
+          <p:nvPr/>
+        </p:nvSpPr>
+        <p:spPr>
+          <a:xfrm>
+            <a:off x="457200" y="320040"/>
+            <a:ext cx="11274552" cy="777240"/>
+          </a:xfrm>
+          <a:prstGeom prst="rect">
+            <a:avLst/>
+          </a:prstGeom>
+          <a:solidFill>
+            <a:srgbClr val="1F497D"/>
+          </a:solidFill>
+        </p:spPr>
+        <p:txBody>
+          <a:bodyPr wrap="square">
+            <a:spAutoFit/>
+          </a:bodyPr>
+          <a:lstStyle/>
+          <a:p>
+            <a:r>
+              <a:rPr sz="3600" b="1">
+                <a:solidFill>
+                  <a:srgbClr val="FFFFFF"/>
+                </a:solidFill>
+              </a:rPr>
+              <a:t>Защо LINQ? — Мотивация</a:t>
+            </a:r>
+          </a:p>
+        </p:txBody>
+      </p:sp>
+      <p:sp>
+        <p:nvSpPr>
+          <p:cNvPr id="3" name="TextBox 2"/>
+          <p:cNvSpPr txBox="1"/>
+          <p:nvPr/>
+        </p:nvSpPr>
+        <p:spPr>
+          <a:xfrm>
+            <a:off x="457200" y="1207008"/>
+            <a:ext cx="11274552" cy="594360"/>
+          </a:xfrm>
+          <a:prstGeom prst="rect">
+            <a:avLst/>
+          </a:prstGeom>
+          <a:noFill/>
+        </p:spPr>
+        <p:txBody>
+          <a:bodyPr wrap="square">
+            <a:spAutoFit/>
+          </a:bodyPr>
+          <a:lstStyle/>
+          <a:p>
+            <a:r>
+              <a:rPr sz="2000">
+                <a:solidFill>
+                  <a:srgbClr val="1F1F1F"/>
+                </a:solidFill>
+              </a:rPr>
+              <a:t>Намерете числата под 50 и ги сортирайте. Без LINQ vs. с LINQ:</a:t>
+            </a:r>
+          </a:p>
+        </p:txBody>
+      </p:sp>
+      <p:sp>
+        <p:nvSpPr>
+          <p:cNvPr id="4" name="TextBox 3"/>
+          <p:cNvSpPr txBox="1"/>
+          <p:nvPr/>
+        </p:nvSpPr>
+        <p:spPr>
+          <a:xfrm>
+            <a:off x="457200" y="1920240"/>
+            <a:ext cx="5394960" cy="3657600"/>
+          </a:xfrm>
+          <a:prstGeom prst="rect">
+            <a:avLst/>
+          </a:prstGeom>
+          <a:solidFill>
+            <a:srgbClr val="F0F0F0"/>
+          </a:solidFill>
+        </p:spPr>
+        <p:txBody>
+          <a:bodyPr wrap="none">
+            <a:spAutoFit/>
+          </a:bodyPr>
+          <a:lstStyle/>
+          <a:p>
+            <a:r>
+              <a:rPr sz="1700">
+                <a:latin typeface="Courier New"/>
+              </a:rPr>
+              <a:t>int[] nums = { 11, 99, 33, 55, 77, 44, 66, 22, 88 };</a:t>
+            </a:r>
+          </a:p>
+          <a:p>
+            <a:r>
+              <a:rPr sz="1700">
+                <a:latin typeface="Courier New"/>
+              </a:rPr>
+              <a:t/>
+            </a:r>
+          </a:p>
+          <a:p>
+            <a:r>
+              <a:rPr sz="1700">
+                <a:solidFill>
+                  <a:srgbClr val="008000"/>
+                </a:solidFill>
+                <a:latin typeface="Courier New"/>
+              </a:rPr>
+              <a:t>// БЕЗ LINQ — 8 реда</a:t>
+            </a:r>
+          </a:p>
+          <a:p>
+            <a:r>
+              <a:rPr sz="1700">
+                <a:latin typeface="Courier New"/>
+              </a:rPr>
+              <a:t>List&lt;int&gt; filtered = new List&lt;int&gt;();</a:t>
+            </a:r>
+          </a:p>
+          <a:p>
+            <a:r>
+              <a:rPr sz="1700">
+                <a:latin typeface="Courier New"/>
+              </a:rPr>
+              <a:t>foreach (var n in nums)</a:t>
+            </a:r>
+          </a:p>
+          <a:p>
+            <a:r>
+              <a:rPr sz="1700">
+                <a:latin typeface="Courier New"/>
+              </a:rPr>
+              <a:t>    if (n &lt; 50) filtered.Add(n);</a:t>
+            </a:r>
+          </a:p>
+          <a:p>
+            <a:r>
+              <a:rPr sz="1700">
+                <a:latin typeface="Courier New"/>
+              </a:rPr>
+              <a:t>filtered.Sort();</a:t>
+            </a:r>
+          </a:p>
+          <a:p>
+            <a:r>
+              <a:rPr sz="1700">
+                <a:latin typeface="Courier New"/>
+              </a:rPr>
+              <a:t>int[] result = filtered.ToArray();</a:t>
+            </a:r>
+          </a:p>
+        </p:txBody>
+      </p:sp>
+      <p:sp>
+        <p:nvSpPr>
+          <p:cNvPr id="5" name="TextBox 4"/>
+          <p:cNvSpPr txBox="1"/>
+          <p:nvPr/>
+        </p:nvSpPr>
+        <p:spPr>
+          <a:xfrm>
+            <a:off x="5760720" y="1920240"/>
+            <a:ext cx="5394960" cy="3657600"/>
+          </a:xfrm>
+          <a:prstGeom prst="rect">
+            <a:avLst/>
+          </a:prstGeom>
+          <a:solidFill>
+            <a:srgbClr val="F0F0F0"/>
+          </a:solidFill>
+        </p:spPr>
+        <p:txBody>
+          <a:bodyPr wrap="none">
+            <a:spAutoFit/>
+          </a:bodyPr>
+          <a:lstStyle/>
+          <a:p>
+            <a:r>
+              <a:rPr sz="1700">
+                <a:solidFill>
+                  <a:srgbClr val="008000"/>
+                </a:solidFill>
+                <a:latin typeface="Courier New"/>
+              </a:rPr>
+              <a:t>// С LINQ — 1 ред</a:t>
+            </a:r>
+          </a:p>
+          <a:p>
+            <a:r>
+              <a:rPr sz="1700">
+                <a:latin typeface="Courier New"/>
+              </a:rPr>
+              <a:t>int[] result = nums</a:t>
+            </a:r>
+          </a:p>
+          <a:p>
+            <a:r>
+              <a:rPr sz="1700">
+                <a:latin typeface="Courier New"/>
+              </a:rPr>
+              <a:t>    .Where(x =&gt; x &lt; 50)</a:t>
+            </a:r>
+          </a:p>
+          <a:p>
+            <a:r>
+              <a:rPr sz="1700">
+                <a:latin typeface="Courier New"/>
+              </a:rPr>
+              <a:t>    .OrderBy(x =&gt; x)</a:t>
+            </a:r>
+          </a:p>
+          <a:p>
+            <a:r>
+              <a:rPr sz="1700">
+                <a:latin typeface="Courier New"/>
+              </a:rPr>
+              <a:t>    .ToArray();</a:t>
+            </a:r>
+          </a:p>
+          <a:p>
+            <a:r>
+              <a:rPr sz="1700">
+                <a:latin typeface="Courier New"/>
+              </a:rPr>
+              <a:t/>
+            </a:r>
+          </a:p>
+          <a:p>
+            <a:r>
+              <a:rPr sz="1700">
+                <a:solidFill>
+                  <a:srgbClr val="008000"/>
+                </a:solidFill>
+                <a:latin typeface="Courier New"/>
+              </a:rPr>
+              <a:t>// result = [ 11, 22, 33, 44 ]</a:t>
+            </a:r>
+          </a:p>
+        </p:txBody>
+      </p:sp>
+    </p:spTree>
+  </p:cSld>
+  <p:clrMapOvr>
+    <a:masterClrMapping/>
+  </p:clrMapOvr>
+</p:sld>
+</file>
+
+<file path=ppt/slides/slide15.xml><?xml version="1.0" encoding="utf-8"?>
+<p:sld xmlns:a="http://schemas.openxmlformats.org/drawingml/2006/main" xmlns:p="http://schemas.openxmlformats.org/presentationml/2006/main" xmlns:r="http://schemas.openxmlformats.org/officeDocument/2006/relationships">
+  <p:cSld>
+    <p:bg>
+      <p:bgPr>
+        <a:solidFill>
+          <a:srgbClr val="FFFFFF"/>
+        </a:solidFill>
+        <a:effectLst/>
+      </p:bgPr>
+    </p:bg>
+    <p:spTree>
+      <p:nvGrpSpPr>
+        <p:cNvPr id="1" name=""/>
+        <p:cNvGrpSpPr/>
+        <p:nvPr/>
+      </p:nvGrpSpPr>
+      <p:grpSpPr/>
+      <p:sp>
+        <p:nvSpPr>
+          <p:cNvPr id="2" name="TextBox 1"/>
+          <p:cNvSpPr txBox="1"/>
+          <p:nvPr/>
+        </p:nvSpPr>
+        <p:spPr>
+          <a:xfrm>
+            <a:off x="457200" y="320040"/>
+            <a:ext cx="11274552" cy="777240"/>
+          </a:xfrm>
+          <a:prstGeom prst="rect">
+            <a:avLst/>
+          </a:prstGeom>
+          <a:solidFill>
+            <a:srgbClr val="1F497D"/>
+          </a:solidFill>
+        </p:spPr>
+        <p:txBody>
+          <a:bodyPr wrap="square">
+            <a:spAutoFit/>
+          </a:bodyPr>
+          <a:lstStyle/>
+          <a:p>
+            <a:r>
+              <a:rPr sz="3600" b="1">
+                <a:solidFill>
+                  <a:srgbClr val="FFFFFF"/>
+                </a:solidFill>
+              </a:rPr>
+              <a:t>Select() — Трансформация на елементи</a:t>
+            </a:r>
+          </a:p>
+        </p:txBody>
+      </p:sp>
+      <p:sp>
+        <p:nvSpPr>
+          <p:cNvPr id="3" name="TextBox 2"/>
+          <p:cNvSpPr txBox="1"/>
+          <p:nvPr/>
+        </p:nvSpPr>
+        <p:spPr>
+          <a:xfrm>
+            <a:off x="457200" y="1207008"/>
+            <a:ext cx="11274552" cy="594360"/>
+          </a:xfrm>
+          <a:prstGeom prst="rect">
+            <a:avLst/>
+          </a:prstGeom>
+          <a:noFill/>
+        </p:spPr>
+        <p:txBody>
+          <a:bodyPr wrap="square">
+            <a:spAutoFit/>
+          </a:bodyPr>
+          <a:lstStyle/>
+          <a:p>
+            <a:r>
+              <a:rPr sz="1900">
+                <a:solidFill>
+                  <a:srgbClr val="1F1F1F"/>
+                </a:solidFill>
+              </a:rPr>
+              <a:t>Select() трансформира всеки елемент — аналог на map() в Python/JS. Резултатът е нова колекция с трансформираните стойности.</a:t>
+            </a:r>
+          </a:p>
+        </p:txBody>
+      </p:sp>
+      <p:sp>
+        <p:nvSpPr>
+          <p:cNvPr id="4" name="TextBox 3"/>
+          <p:cNvSpPr txBox="1"/>
+          <p:nvPr/>
+        </p:nvSpPr>
+        <p:spPr>
+          <a:xfrm>
+            <a:off x="457200" y="1920240"/>
+            <a:ext cx="11274552" cy="3931920"/>
+          </a:xfrm>
+          <a:prstGeom prst="rect">
+            <a:avLst/>
+          </a:prstGeom>
+          <a:solidFill>
+            <a:srgbClr val="F0F0F0"/>
+          </a:solidFill>
+        </p:spPr>
+        <p:txBody>
+          <a:bodyPr wrap="none">
+            <a:spAutoFit/>
+          </a:bodyPr>
+          <a:lstStyle/>
+          <a:p>
+            <a:r>
+              <a:rPr sz="1700">
+                <a:latin typeface="Courier New"/>
+              </a:rPr>
+              <a:t>int[] nums = { 1, 2, 3, 4, 5 };</a:t>
+            </a:r>
+          </a:p>
+          <a:p>
+            <a:r>
+              <a:rPr sz="1700">
+                <a:latin typeface="Courier New"/>
+              </a:rPr>
+              <a:t/>
+            </a:r>
+          </a:p>
+          <a:p>
+            <a:r>
+              <a:rPr sz="1700">
+                <a:latin typeface="Courier New"/>
+              </a:rPr>
+              <a:t>int[] doubled = nums.</a:t>
+            </a:r>
+            <a:r>
+              <a:rPr sz="1700">
+                <a:solidFill>
+                  <a:srgbClr val="00B0F0"/>
+                </a:solidFill>
+                <a:latin typeface="Courier New"/>
+              </a:rPr>
+              <a:t>Select</a:t>
+            </a:r>
+            <a:r>
+              <a:rPr sz="1700">
+                <a:latin typeface="Courier New"/>
+              </a:rPr>
+              <a:t>(x =&gt; x * 2).</a:t>
+            </a:r>
+            <a:r>
+              <a:rPr sz="1700">
+                <a:solidFill>
+                  <a:srgbClr val="00B0F0"/>
+                </a:solidFill>
+                <a:latin typeface="Courier New"/>
+              </a:rPr>
+              <a:t>ToArray</a:t>
+            </a:r>
+            <a:r>
+              <a:rPr sz="1700">
+                <a:latin typeface="Courier New"/>
+              </a:rPr>
+              <a:t>();</a:t>
+            </a:r>
+          </a:p>
+          <a:p>
+            <a:r>
+              <a:rPr sz="1700">
+                <a:solidFill>
+                  <a:srgbClr val="008000"/>
+                </a:solidFill>
+                <a:latin typeface="Courier New"/>
+              </a:rPr>
+              <a:t>// doubled = [ 2, 4, 6, 8, 10 ]</a:t>
+            </a:r>
+          </a:p>
+          <a:p>
+            <a:r>
+              <a:rPr sz="1700">
+                <a:latin typeface="Courier New"/>
+              </a:rPr>
+              <a:t/>
+            </a:r>
+          </a:p>
+          <a:p>
+            <a:r>
+              <a:rPr sz="1700">
+                <a:latin typeface="Courier New"/>
+              </a:rPr>
+              <a:t>string[] words = { "hello", "world", "linq" };</a:t>
+            </a:r>
+          </a:p>
+          <a:p>
+            <a:r>
+              <a:rPr sz="1700">
+                <a:latin typeface="Courier New"/>
+              </a:rPr>
+              <a:t>string[] upper = words.</a:t>
+            </a:r>
+            <a:r>
+              <a:rPr sz="1700">
+                <a:solidFill>
+                  <a:srgbClr val="00B0F0"/>
+                </a:solidFill>
+                <a:latin typeface="Courier New"/>
+              </a:rPr>
+              <a:t>Select</a:t>
+            </a:r>
+            <a:r>
+              <a:rPr sz="1700">
+                <a:latin typeface="Courier New"/>
+              </a:rPr>
+              <a:t>(w =&gt; w.</a:t>
+            </a:r>
+            <a:r>
+              <a:rPr sz="1700">
+                <a:solidFill>
+                  <a:srgbClr val="00B0F0"/>
+                </a:solidFill>
+                <a:latin typeface="Courier New"/>
+              </a:rPr>
+              <a:t>ToUpper</a:t>
+            </a:r>
+            <a:r>
+              <a:rPr sz="1700">
+                <a:latin typeface="Courier New"/>
+              </a:rPr>
+              <a:t>()).</a:t>
+            </a:r>
+            <a:r>
+              <a:rPr sz="1700">
+                <a:solidFill>
+                  <a:srgbClr val="00B0F0"/>
+                </a:solidFill>
+                <a:latin typeface="Courier New"/>
+              </a:rPr>
+              <a:t>ToArray</a:t>
+            </a:r>
+            <a:r>
+              <a:rPr sz="1700">
+                <a:latin typeface="Courier New"/>
+              </a:rPr>
+              <a:t>();</a:t>
+            </a:r>
+          </a:p>
+          <a:p>
+            <a:r>
+              <a:rPr sz="1700">
+                <a:solidFill>
+                  <a:srgbClr val="008000"/>
+                </a:solidFill>
+                <a:latin typeface="Courier New"/>
+              </a:rPr>
+              <a:t>// upper = [ "HELLO", "WORLD", "LINQ" ]</a:t>
+            </a:r>
+          </a:p>
+          <a:p>
+            <a:r>
+              <a:rPr sz="1700">
+                <a:latin typeface="Courier New"/>
+              </a:rPr>
+              <a:t/>
+            </a:r>
+          </a:p>
+          <a:p>
+            <a:r>
+              <a:rPr sz="1700">
+                <a:solidFill>
+                  <a:srgbClr val="008000"/>
+                </a:solidFill>
+                <a:latin typeface="Courier New"/>
+              </a:rPr>
+              <a:t>// Select с индекс — вторият параметър е позицията</a:t>
+            </a:r>
+          </a:p>
+          <a:p>
+            <a:r>
+              <a:rPr sz="1700">
+                <a:latin typeface="Courier New"/>
+              </a:rPr>
+              <a:t>var indexed = nums.</a:t>
+            </a:r>
+            <a:r>
+              <a:rPr sz="1700">
+                <a:solidFill>
+                  <a:srgbClr val="00B0F0"/>
+                </a:solidFill>
+                <a:latin typeface="Courier New"/>
+              </a:rPr>
+              <a:t>Select</a:t>
+            </a:r>
+            <a:r>
+              <a:rPr sz="1700">
+                <a:latin typeface="Courier New"/>
+              </a:rPr>
+              <a:t>((x, i) =&gt; $"[{i}]={x}").</a:t>
+            </a:r>
+            <a:r>
+              <a:rPr sz="1700">
+                <a:solidFill>
+                  <a:srgbClr val="00B0F0"/>
+                </a:solidFill>
+                <a:latin typeface="Courier New"/>
+              </a:rPr>
+              <a:t>ToList</a:t>
+            </a:r>
+            <a:r>
+              <a:rPr sz="1700">
+                <a:latin typeface="Courier New"/>
+              </a:rPr>
+              <a:t>();</a:t>
+            </a:r>
+          </a:p>
+          <a:p>
+            <a:r>
+              <a:rPr sz="1700">
+                <a:solidFill>
+                  <a:srgbClr val="008000"/>
+                </a:solidFill>
+                <a:latin typeface="Courier New"/>
+              </a:rPr>
+              <a:t>// indexed = [ "[0]=1", "[1]=2", "[2]=3", "[3]=4", "[4]=5" ]</a:t>
+            </a:r>
+          </a:p>
+        </p:txBody>
+      </p:sp>
+    </p:spTree>
+  </p:cSld>
+  <p:clrMapOvr>
+    <a:masterClrMapping/>
+  </p:clrMapOvr>
+</p:sld>
+</file>
+
+<file path=ppt/slides/slide16.xml><?xml version="1.0" encoding="utf-8"?>
+<p:sld xmlns:a="http://schemas.openxmlformats.org/drawingml/2006/main" xmlns:p="http://schemas.openxmlformats.org/presentationml/2006/main" xmlns:r="http://schemas.openxmlformats.org/officeDocument/2006/relationships">
+  <p:cSld>
+    <p:bg>
+      <p:bgPr>
+        <a:solidFill>
+          <a:srgbClr val="FFFFFF"/>
+        </a:solidFill>
+        <a:effectLst/>
+      </p:bgPr>
+    </p:bg>
+    <p:spTree>
+      <p:nvGrpSpPr>
+        <p:cNvPr id="1" name=""/>
+        <p:cNvGrpSpPr/>
+        <p:nvPr/>
+      </p:nvGrpSpPr>
+      <p:grpSpPr/>
+      <p:sp>
+        <p:nvSpPr>
+          <p:cNvPr id="2" name="TextBox 1"/>
+          <p:cNvSpPr txBox="1"/>
+          <p:nvPr/>
+        </p:nvSpPr>
+        <p:spPr>
+          <a:xfrm>
+            <a:off x="457200" y="320040"/>
+            <a:ext cx="11274552" cy="777240"/>
+          </a:xfrm>
+          <a:prstGeom prst="rect">
+            <a:avLst/>
+          </a:prstGeom>
+          <a:solidFill>
+            <a:srgbClr val="1F497D"/>
+          </a:solidFill>
+        </p:spPr>
+        <p:txBody>
+          <a:bodyPr wrap="square">
+            <a:spAutoFit/>
+          </a:bodyPr>
+          <a:lstStyle/>
+          <a:p>
+            <a:r>
+              <a:rPr sz="3600" b="1">
+                <a:solidFill>
+                  <a:srgbClr val="FFFFFF"/>
+                </a:solidFill>
+              </a:rPr>
+              <a:t>Агрегатни функции: Sum, Min, Max, Average</a:t>
+            </a:r>
+          </a:p>
+        </p:txBody>
+      </p:sp>
+      <p:sp>
+        <p:nvSpPr>
+          <p:cNvPr id="3" name="TextBox 2"/>
+          <p:cNvSpPr txBox="1"/>
+          <p:nvPr/>
+        </p:nvSpPr>
+        <p:spPr>
+          <a:xfrm>
+            <a:off x="457200" y="1207008"/>
+            <a:ext cx="11274552" cy="594360"/>
+          </a:xfrm>
+          <a:prstGeom prst="rect">
+            <a:avLst/>
+          </a:prstGeom>
+          <a:noFill/>
+        </p:spPr>
+        <p:txBody>
+          <a:bodyPr wrap="square">
+            <a:spAutoFit/>
+          </a:bodyPr>
+          <a:lstStyle/>
+          <a:p>
+            <a:r>
+              <a:rPr sz="2000">
+                <a:solidFill>
+                  <a:srgbClr val="1F1F1F"/>
+                </a:solidFill>
+              </a:rPr>
+              <a:t>Пресмятат единична стойност от цялата колекция — без нужда от for-цикъл.</a:t>
+            </a:r>
+          </a:p>
+        </p:txBody>
+      </p:sp>
+      <p:sp>
+        <p:nvSpPr>
+          <p:cNvPr id="4" name="TextBox 3"/>
+          <p:cNvSpPr txBox="1"/>
+          <p:nvPr/>
+        </p:nvSpPr>
+        <p:spPr>
+          <a:xfrm>
+            <a:off x="457200" y="1828800"/>
+            <a:ext cx="11274552" cy="4114800"/>
+          </a:xfrm>
+          <a:prstGeom prst="rect">
+            <a:avLst/>
+          </a:prstGeom>
+          <a:solidFill>
+            <a:srgbClr val="F0F0F0"/>
+          </a:solidFill>
+        </p:spPr>
+        <p:txBody>
+          <a:bodyPr wrap="none">
+            <a:spAutoFit/>
+          </a:bodyPr>
+          <a:lstStyle/>
+          <a:p>
+            <a:r>
+              <a:rPr sz="1700">
+                <a:latin typeface="Courier New"/>
+              </a:rPr>
+              <a:t>int[] scores = { 85, 92, 78, 95, 60, 88 };</a:t>
+            </a:r>
+          </a:p>
+          <a:p>
+            <a:r>
+              <a:rPr sz="1700">
+                <a:latin typeface="Courier New"/>
+              </a:rPr>
+              <a:t/>
+            </a:r>
+          </a:p>
+          <a:p>
+            <a:r>
+              <a:rPr sz="1700">
+                <a:latin typeface="Courier New"/>
+              </a:rPr>
+              <a:t>int   total   = scores.</a:t>
+            </a:r>
+            <a:r>
+              <a:rPr sz="1700">
+                <a:solidFill>
+                  <a:srgbClr val="00B0F0"/>
+                </a:solidFill>
+                <a:latin typeface="Courier New"/>
+              </a:rPr>
+              <a:t>Sum</a:t>
+            </a:r>
+            <a:r>
+              <a:rPr sz="1700">
+                <a:latin typeface="Courier New"/>
+              </a:rPr>
+              <a:t>();</a:t>
+            </a:r>
+            <a:r>
+              <a:rPr sz="1700">
+                <a:solidFill>
+                  <a:srgbClr val="008000"/>
+                </a:solidFill>
+                <a:latin typeface="Courier New"/>
+              </a:rPr>
+              <a:t>          // 498</a:t>
+            </a:r>
+          </a:p>
+          <a:p>
+            <a:r>
+              <a:rPr sz="1700">
+                <a:latin typeface="Courier New"/>
+              </a:rPr>
+              <a:t>int   highest = scores.</a:t>
+            </a:r>
+            <a:r>
+              <a:rPr sz="1700">
+                <a:solidFill>
+                  <a:srgbClr val="00B0F0"/>
+                </a:solidFill>
+                <a:latin typeface="Courier New"/>
+              </a:rPr>
+              <a:t>Max</a:t>
+            </a:r>
+            <a:r>
+              <a:rPr sz="1700">
+                <a:latin typeface="Courier New"/>
+              </a:rPr>
+              <a:t>();</a:t>
+            </a:r>
+            <a:r>
+              <a:rPr sz="1700">
+                <a:solidFill>
+                  <a:srgbClr val="008000"/>
+                </a:solidFill>
+                <a:latin typeface="Courier New"/>
+              </a:rPr>
+              <a:t>          // 95</a:t>
+            </a:r>
+          </a:p>
+          <a:p>
+            <a:r>
+              <a:rPr sz="1700">
+                <a:latin typeface="Courier New"/>
+              </a:rPr>
+              <a:t>int   lowest  = scores.</a:t>
+            </a:r>
+            <a:r>
+              <a:rPr sz="1700">
+                <a:solidFill>
+                  <a:srgbClr val="00B0F0"/>
+                </a:solidFill>
+                <a:latin typeface="Courier New"/>
+              </a:rPr>
+              <a:t>Min</a:t>
+            </a:r>
+            <a:r>
+              <a:rPr sz="1700">
+                <a:latin typeface="Courier New"/>
+              </a:rPr>
+              <a:t>();</a:t>
+            </a:r>
+            <a:r>
+              <a:rPr sz="1700">
+                <a:solidFill>
+                  <a:srgbClr val="008000"/>
+                </a:solidFill>
+                <a:latin typeface="Courier New"/>
+              </a:rPr>
+              <a:t>          // 60</a:t>
+            </a:r>
+          </a:p>
+          <a:p>
+            <a:r>
+              <a:rPr sz="1700">
+                <a:latin typeface="Courier New"/>
+              </a:rPr>
+              <a:t>double avg    = scores.</a:t>
+            </a:r>
+            <a:r>
+              <a:rPr sz="1700">
+                <a:solidFill>
+                  <a:srgbClr val="00B0F0"/>
+                </a:solidFill>
+                <a:latin typeface="Courier New"/>
+              </a:rPr>
+              <a:t>Average</a:t>
+            </a:r>
+            <a:r>
+              <a:rPr sz="1700">
+                <a:latin typeface="Courier New"/>
+              </a:rPr>
+              <a:t>();</a:t>
+            </a:r>
+            <a:r>
+              <a:rPr sz="1700">
+                <a:solidFill>
+                  <a:srgbClr val="008000"/>
+                </a:solidFill>
+                <a:latin typeface="Courier New"/>
+              </a:rPr>
+              <a:t>       // 83.0</a:t>
+            </a:r>
+          </a:p>
+          <a:p>
+            <a:r>
+              <a:rPr sz="1700">
+                <a:latin typeface="Courier New"/>
+              </a:rPr>
+              <a:t/>
+            </a:r>
+          </a:p>
+          <a:p>
+            <a:r>
+              <a:rPr sz="1700">
+                <a:solidFill>
+                  <a:srgbClr val="008000"/>
+                </a:solidFill>
+                <a:latin typeface="Courier New"/>
+              </a:rPr>
+              <a:t>// С ламбда — агрегат само на четните оценки:</a:t>
+            </a:r>
+          </a:p>
+          <a:p>
+            <a:r>
+              <a:rPr sz="1700">
+                <a:latin typeface="Courier New"/>
+              </a:rPr>
+              <a:t>int evenSum = scores.</a:t>
+            </a:r>
+            <a:r>
+              <a:rPr sz="1700">
+                <a:solidFill>
+                  <a:srgbClr val="00B0F0"/>
+                </a:solidFill>
+                <a:latin typeface="Courier New"/>
+              </a:rPr>
+              <a:t>Where</a:t>
+            </a:r>
+            <a:r>
+              <a:rPr sz="1700">
+                <a:latin typeface="Courier New"/>
+              </a:rPr>
+              <a:t>(x =&gt; x % 2 == 0).</a:t>
+            </a:r>
+            <a:r>
+              <a:rPr sz="1700">
+                <a:solidFill>
+                  <a:srgbClr val="00B0F0"/>
+                </a:solidFill>
+                <a:latin typeface="Courier New"/>
+              </a:rPr>
+              <a:t>Sum</a:t>
+            </a:r>
+            <a:r>
+              <a:rPr sz="1700">
+                <a:latin typeface="Courier New"/>
+              </a:rPr>
+              <a:t>();</a:t>
+            </a:r>
+            <a:r>
+              <a:rPr sz="1700">
+                <a:solidFill>
+                  <a:srgbClr val="008000"/>
+                </a:solidFill>
+                <a:latin typeface="Courier New"/>
+              </a:rPr>
+              <a:t>  // 270</a:t>
+            </a:r>
+          </a:p>
+          <a:p>
+            <a:r>
+              <a:rPr sz="1700">
+                <a:latin typeface="Courier New"/>
+              </a:rPr>
+              <a:t/>
+            </a:r>
+          </a:p>
+          <a:p>
+            <a:r>
+              <a:rPr sz="1700">
+                <a:solidFill>
+                  <a:srgbClr val="008000"/>
+                </a:solidFill>
+                <a:latin typeface="Courier New"/>
+              </a:rPr>
+              <a:t>// Sum по свойство на обект:</a:t>
+            </a:r>
+          </a:p>
+          <a:p>
+            <a:r>
+              <a:rPr sz="1700">
+                <a:latin typeface="Courier New"/>
+              </a:rPr>
+              <a:t>List&lt;Product&gt; products = GetProducts();</a:t>
+            </a:r>
+          </a:p>
+          <a:p>
+            <a:r>
+              <a:rPr sz="1700">
+                <a:latin typeface="Courier New"/>
+              </a:rPr>
+              <a:t>decimal total = products.</a:t>
+            </a:r>
+            <a:r>
+              <a:rPr sz="1700">
+                <a:solidFill>
+                  <a:srgbClr val="00B0F0"/>
+                </a:solidFill>
+                <a:latin typeface="Courier New"/>
+              </a:rPr>
+              <a:t>Sum</a:t>
+            </a:r>
+            <a:r>
+              <a:rPr sz="1700">
+                <a:latin typeface="Courier New"/>
+              </a:rPr>
+              <a:t>(p =&gt; p.Price);</a:t>
+            </a:r>
+          </a:p>
+        </p:txBody>
+      </p:sp>
+    </p:spTree>
+  </p:cSld>
+  <p:clrMapOvr>
+    <a:masterClrMapping/>
+  </p:clrMapOvr>
+</p:sld>
+</file>
+
+<file path=ppt/slides/slide17.xml><?xml version="1.0" encoding="utf-8"?>
+<p:sld xmlns:a="http://schemas.openxmlformats.org/drawingml/2006/main" xmlns:p="http://schemas.openxmlformats.org/presentationml/2006/main" xmlns:r="http://schemas.openxmlformats.org/officeDocument/2006/relationships">
+  <p:cSld>
+    <p:bg>
+      <p:bgPr>
+        <a:solidFill>
+          <a:srgbClr val="FFFFFF"/>
+        </a:solidFill>
+        <a:effectLst/>
+      </p:bgPr>
+    </p:bg>
+    <p:spTree>
+      <p:nvGrpSpPr>
+        <p:cNvPr id="1" name=""/>
+        <p:cNvGrpSpPr/>
+        <p:nvPr/>
+      </p:nvGrpSpPr>
+      <p:grpSpPr/>
+      <p:sp>
+        <p:nvSpPr>
+          <p:cNvPr id="2" name="TextBox 1"/>
+          <p:cNvSpPr txBox="1"/>
+          <p:nvPr/>
+        </p:nvSpPr>
+        <p:spPr>
+          <a:xfrm>
+            <a:off x="457200" y="320040"/>
+            <a:ext cx="11274552" cy="777240"/>
+          </a:xfrm>
+          <a:prstGeom prst="rect">
+            <a:avLst/>
+          </a:prstGeom>
+          <a:solidFill>
+            <a:srgbClr val="1F497D"/>
+          </a:solidFill>
+        </p:spPr>
+        <p:txBody>
+          <a:bodyPr wrap="square">
+            <a:spAutoFit/>
+          </a:bodyPr>
+          <a:lstStyle/>
+          <a:p>
+            <a:r>
+              <a:rPr sz="3600" b="1">
+                <a:solidFill>
+                  <a:srgbClr val="FFFFFF"/>
+                </a:solidFill>
+              </a:rPr>
+              <a:t>Any() и All() — Проверки върху колекция</a:t>
+            </a:r>
+          </a:p>
+        </p:txBody>
+      </p:sp>
+      <p:sp>
+        <p:nvSpPr>
+          <p:cNvPr id="3" name="TextBox 2"/>
+          <p:cNvSpPr txBox="1"/>
+          <p:nvPr/>
+        </p:nvSpPr>
+        <p:spPr>
+          <a:xfrm>
+            <a:off x="457200" y="1207008"/>
+            <a:ext cx="11274552" cy="594360"/>
+          </a:xfrm>
+          <a:prstGeom prst="rect">
+            <a:avLst/>
+          </a:prstGeom>
+          <a:noFill/>
+        </p:spPr>
+        <p:txBody>
+          <a:bodyPr wrap="square">
+            <a:spAutoFit/>
+          </a:bodyPr>
+          <a:lstStyle/>
+          <a:p>
+            <a:r>
+              <a:rPr sz="1900">
+                <a:solidFill>
+                  <a:srgbClr val="1F1F1F"/>
+                </a:solidFill>
+              </a:rPr>
+              <a:t>Any() — вярно ако поне един елемент отговаря на условието. All() — вярно ако ВСИЧКИ отговарят.</a:t>
+            </a:r>
+          </a:p>
+        </p:txBody>
+      </p:sp>
+      <p:sp>
+        <p:nvSpPr>
+          <p:cNvPr id="4" name="TextBox 3"/>
+          <p:cNvSpPr txBox="1"/>
+          <p:nvPr/>
+        </p:nvSpPr>
+        <p:spPr>
+          <a:xfrm>
+            <a:off x="457200" y="1920240"/>
+            <a:ext cx="11274552" cy="3931920"/>
+          </a:xfrm>
+          <a:prstGeom prst="rect">
+            <a:avLst/>
+          </a:prstGeom>
+          <a:solidFill>
+            <a:srgbClr val="F0F0F0"/>
+          </a:solidFill>
+        </p:spPr>
+        <p:txBody>
+          <a:bodyPr wrap="none">
+            <a:spAutoFit/>
+          </a:bodyPr>
+          <a:lstStyle/>
+          <a:p>
+            <a:r>
+              <a:rPr sz="1700">
+                <a:latin typeface="Courier New"/>
+              </a:rPr>
+              <a:t>int[] grades = { 85, 92, 45, 78, 60 };</a:t>
+            </a:r>
+          </a:p>
+          <a:p>
+            <a:r>
+              <a:rPr sz="1700">
+                <a:latin typeface="Courier New"/>
+              </a:rPr>
+              <a:t/>
+            </a:r>
+          </a:p>
+          <a:p>
+            <a:r>
+              <a:rPr sz="1700">
+                <a:latin typeface="Courier New"/>
+              </a:rPr>
+              <a:t>bool anyFail   = grades.</a:t>
+            </a:r>
+            <a:r>
+              <a:rPr sz="1700">
+                <a:solidFill>
+                  <a:srgbClr val="00B0F0"/>
+                </a:solidFill>
+                <a:latin typeface="Courier New"/>
+              </a:rPr>
+              <a:t>Any</a:t>
+            </a:r>
+            <a:r>
+              <a:rPr sz="1700">
+                <a:latin typeface="Courier New"/>
+              </a:rPr>
+              <a:t>(g =&gt; g &lt; 50);</a:t>
+            </a:r>
+            <a:r>
+              <a:rPr sz="1700">
+                <a:solidFill>
+                  <a:srgbClr val="008000"/>
+                </a:solidFill>
+                <a:latin typeface="Courier New"/>
+              </a:rPr>
+              <a:t>   // true  (45 &lt; 50)</a:t>
+            </a:r>
+          </a:p>
+          <a:p>
+            <a:r>
+              <a:rPr sz="1700">
+                <a:latin typeface="Courier New"/>
+              </a:rPr>
+              <a:t>bool allPass   = grades.</a:t>
+            </a:r>
+            <a:r>
+              <a:rPr sz="1700">
+                <a:solidFill>
+                  <a:srgbClr val="00B0F0"/>
+                </a:solidFill>
+                <a:latin typeface="Courier New"/>
+              </a:rPr>
+              <a:t>All</a:t>
+            </a:r>
+            <a:r>
+              <a:rPr sz="1700">
+                <a:latin typeface="Courier New"/>
+              </a:rPr>
+              <a:t>(g =&gt; g &gt;= 50);</a:t>
+            </a:r>
+            <a:r>
+              <a:rPr sz="1700">
+                <a:solidFill>
+                  <a:srgbClr val="008000"/>
+                </a:solidFill>
+                <a:latin typeface="Courier New"/>
+              </a:rPr>
+              <a:t>   // false (45 &lt; 50)</a:t>
+            </a:r>
+          </a:p>
+          <a:p>
+            <a:r>
+              <a:rPr sz="1700">
+                <a:latin typeface="Courier New"/>
+              </a:rPr>
+              <a:t>bool anyExcell = grades.</a:t>
+            </a:r>
+            <a:r>
+              <a:rPr sz="1700">
+                <a:solidFill>
+                  <a:srgbClr val="00B0F0"/>
+                </a:solidFill>
+                <a:latin typeface="Courier New"/>
+              </a:rPr>
+              <a:t>Any</a:t>
+            </a:r>
+            <a:r>
+              <a:rPr sz="1700">
+                <a:latin typeface="Courier New"/>
+              </a:rPr>
+              <a:t>(g =&gt; g &gt;= 90);</a:t>
+            </a:r>
+            <a:r>
+              <a:rPr sz="1700">
+                <a:solidFill>
+                  <a:srgbClr val="008000"/>
+                </a:solidFill>
+                <a:latin typeface="Courier New"/>
+              </a:rPr>
+              <a:t>   // true  (92 &gt;= 90)</a:t>
+            </a:r>
+          </a:p>
+          <a:p>
+            <a:r>
+              <a:rPr sz="1700">
+                <a:latin typeface="Courier New"/>
+              </a:rPr>
+              <a:t/>
+            </a:r>
+          </a:p>
+          <a:p>
+            <a:r>
+              <a:rPr sz="1700">
+                <a:solidFill>
+                  <a:srgbClr val="008000"/>
+                </a:solidFill>
+                <a:latin typeface="Courier New"/>
+              </a:rPr>
+              <a:t>// Any() без параметър — проверява дали колекцията НЕ е празна:</a:t>
+            </a:r>
+          </a:p>
+          <a:p>
+            <a:r>
+              <a:rPr sz="1700">
+                <a:latin typeface="Courier New"/>
+              </a:rPr>
+              <a:t>bool hasData = grades.</a:t>
+            </a:r>
+            <a:r>
+              <a:rPr sz="1700">
+                <a:solidFill>
+                  <a:srgbClr val="00B0F0"/>
+                </a:solidFill>
+                <a:latin typeface="Courier New"/>
+              </a:rPr>
+              <a:t>Any</a:t>
+            </a:r>
+            <a:r>
+              <a:rPr sz="1700">
+                <a:latin typeface="Courier New"/>
+              </a:rPr>
+              <a:t>();</a:t>
+            </a:r>
+            <a:r>
+              <a:rPr sz="1700">
+                <a:solidFill>
+                  <a:srgbClr val="008000"/>
+                </a:solidFill>
+                <a:latin typeface="Courier New"/>
+              </a:rPr>
+              <a:t>                       // true</a:t>
+            </a:r>
+          </a:p>
+          <a:p>
+            <a:r>
+              <a:rPr sz="1700">
+                <a:latin typeface="Courier New"/>
+              </a:rPr>
+              <a:t/>
+            </a:r>
+          </a:p>
+          <a:p>
+            <a:r>
+              <a:rPr sz="1700">
+                <a:solidFill>
+                  <a:srgbClr val="008000"/>
+                </a:solidFill>
+                <a:latin typeface="Courier New"/>
+              </a:rPr>
+              <a:t>// Практически пример — не изчислявай ако няма данни:</a:t>
+            </a:r>
+          </a:p>
+          <a:p>
+            <a:r>
+              <a:rPr sz="1700">
+                <a:latin typeface="Courier New"/>
+              </a:rPr>
+              <a:t>if (scores.</a:t>
+            </a:r>
+            <a:r>
+              <a:rPr sz="1700">
+                <a:solidFill>
+                  <a:srgbClr val="00B0F0"/>
+                </a:solidFill>
+                <a:latin typeface="Courier New"/>
+              </a:rPr>
+              <a:t>Any</a:t>
+            </a:r>
+            <a:r>
+              <a:rPr sz="1700">
+                <a:latin typeface="Courier New"/>
+              </a:rPr>
+              <a:t>())</a:t>
+            </a:r>
+          </a:p>
+          <a:p>
+            <a:r>
+              <a:rPr sz="1700">
+                <a:latin typeface="Courier New"/>
+              </a:rPr>
+              <a:t>    Console.WriteLine(scores.</a:t>
+            </a:r>
+            <a:r>
+              <a:rPr sz="1700">
+                <a:solidFill>
+                  <a:srgbClr val="00B0F0"/>
+                </a:solidFill>
+                <a:latin typeface="Courier New"/>
+              </a:rPr>
+              <a:t>Average</a:t>
+            </a:r>
+            <a:r>
+              <a:rPr sz="1700">
+                <a:latin typeface="Courier New"/>
+              </a:rPr>
+              <a:t>());</a:t>
+            </a:r>
+          </a:p>
+        </p:txBody>
+      </p:sp>
+    </p:spTree>
+  </p:cSld>
+  <p:clrMapOvr>
+    <a:masterClrMapping/>
+  </p:clrMapOvr>
+</p:sld>
+</file>
+
+<file path=ppt/slides/slide18.xml><?xml version="1.0" encoding="utf-8"?>
+<p:sld xmlns:a="http://schemas.openxmlformats.org/drawingml/2006/main" xmlns:p="http://schemas.openxmlformats.org/presentationml/2006/main" xmlns:r="http://schemas.openxmlformats.org/officeDocument/2006/relationships">
+  <p:cSld>
+    <p:bg>
+      <p:bgPr>
+        <a:solidFill>
+          <a:srgbClr val="FFFFFF"/>
+        </a:solidFill>
+        <a:effectLst/>
+      </p:bgPr>
+    </p:bg>
+    <p:spTree>
+      <p:nvGrpSpPr>
+        <p:cNvPr id="1" name=""/>
+        <p:cNvGrpSpPr/>
+        <p:nvPr/>
+      </p:nvGrpSpPr>
+      <p:grpSpPr/>
+      <p:sp>
+        <p:nvSpPr>
+          <p:cNvPr id="2" name="TextBox 1"/>
+          <p:cNvSpPr txBox="1"/>
+          <p:nvPr/>
+        </p:nvSpPr>
+        <p:spPr>
+          <a:xfrm>
+            <a:off x="457200" y="320040"/>
+            <a:ext cx="11274552" cy="777240"/>
+          </a:xfrm>
+          <a:prstGeom prst="rect">
+            <a:avLst/>
+          </a:prstGeom>
+          <a:solidFill>
+            <a:srgbClr val="1F497D"/>
+          </a:solidFill>
+        </p:spPr>
+        <p:txBody>
+          <a:bodyPr wrap="square">
+            <a:spAutoFit/>
+          </a:bodyPr>
+          <a:lstStyle/>
+          <a:p>
+            <a:r>
+              <a:rPr sz="3600" b="1">
+                <a:solidFill>
+                  <a:srgbClr val="FFFFFF"/>
+                </a:solidFill>
+              </a:rPr>
+              <a:t>Skip() и Take() — Пагинация и диапазони</a:t>
+            </a:r>
+          </a:p>
+        </p:txBody>
+      </p:sp>
+      <p:sp>
+        <p:nvSpPr>
+          <p:cNvPr id="3" name="TextBox 2"/>
+          <p:cNvSpPr txBox="1"/>
+          <p:nvPr/>
+        </p:nvSpPr>
+        <p:spPr>
+          <a:xfrm>
+            <a:off x="457200" y="1207008"/>
+            <a:ext cx="11274552" cy="594360"/>
+          </a:xfrm>
+          <a:prstGeom prst="rect">
+            <a:avLst/>
+          </a:prstGeom>
+          <a:noFill/>
+        </p:spPr>
+        <p:txBody>
+          <a:bodyPr wrap="square">
+            <a:spAutoFit/>
+          </a:bodyPr>
+          <a:lstStyle/>
+          <a:p>
+            <a:r>
+              <a:rPr sz="1900">
+                <a:solidFill>
+                  <a:srgbClr val="1F1F1F"/>
+                </a:solidFill>
+              </a:rPr>
+              <a:t>Take(n) взима първите n елемента. Skip(n) прескача първите n. Комбинирани — пагинация (страниране на резултати).</a:t>
+            </a:r>
+          </a:p>
+        </p:txBody>
+      </p:sp>
+      <p:sp>
+        <p:nvSpPr>
+          <p:cNvPr id="4" name="TextBox 3"/>
+          <p:cNvSpPr txBox="1"/>
+          <p:nvPr/>
+        </p:nvSpPr>
+        <p:spPr>
+          <a:xfrm>
+            <a:off x="457200" y="1828800"/>
+            <a:ext cx="11274552" cy="4114800"/>
+          </a:xfrm>
+          <a:prstGeom prst="rect">
+            <a:avLst/>
+          </a:prstGeom>
+          <a:solidFill>
+            <a:srgbClr val="F0F0F0"/>
+          </a:solidFill>
+        </p:spPr>
+        <p:txBody>
+          <a:bodyPr wrap="none">
+            <a:spAutoFit/>
+          </a:bodyPr>
+          <a:lstStyle/>
+          <a:p>
+            <a:r>
+              <a:rPr sz="1700">
+                <a:latin typeface="Courier New"/>
+              </a:rPr>
+              <a:t>int[] nums = { 1, 2, 3, 4, 5, 6, 7, 8, 9, 10 };</a:t>
+            </a:r>
+          </a:p>
+          <a:p>
+            <a:r>
+              <a:rPr sz="1700">
+                <a:latin typeface="Courier New"/>
+              </a:rPr>
+              <a:t/>
+            </a:r>
+          </a:p>
+          <a:p>
+            <a:r>
+              <a:rPr sz="1700">
+                <a:latin typeface="Courier New"/>
+              </a:rPr>
+              <a:t>var first3 = nums.</a:t>
+            </a:r>
+            <a:r>
+              <a:rPr sz="1700">
+                <a:solidFill>
+                  <a:srgbClr val="00B0F0"/>
+                </a:solidFill>
+                <a:latin typeface="Courier New"/>
+              </a:rPr>
+              <a:t>Take</a:t>
+            </a:r>
+            <a:r>
+              <a:rPr sz="1700">
+                <a:latin typeface="Courier New"/>
+              </a:rPr>
+              <a:t>(3);</a:t>
+            </a:r>
+            <a:r>
+              <a:rPr sz="1700">
+                <a:solidFill>
+                  <a:srgbClr val="008000"/>
+                </a:solidFill>
+                <a:latin typeface="Courier New"/>
+              </a:rPr>
+              <a:t>               // 1 2 3</a:t>
+            </a:r>
+          </a:p>
+          <a:p>
+            <a:r>
+              <a:rPr sz="1700">
+                <a:latin typeface="Courier New"/>
+              </a:rPr>
+              <a:t>var skip3  = nums.</a:t>
+            </a:r>
+            <a:r>
+              <a:rPr sz="1700">
+                <a:solidFill>
+                  <a:srgbClr val="00B0F0"/>
+                </a:solidFill>
+                <a:latin typeface="Courier New"/>
+              </a:rPr>
+              <a:t>Skip</a:t>
+            </a:r>
+            <a:r>
+              <a:rPr sz="1700">
+                <a:latin typeface="Courier New"/>
+              </a:rPr>
+              <a:t>(3);</a:t>
+            </a:r>
+            <a:r>
+              <a:rPr sz="1700">
+                <a:solidFill>
+                  <a:srgbClr val="008000"/>
+                </a:solidFill>
+                <a:latin typeface="Courier New"/>
+              </a:rPr>
+              <a:t>               // 4 5 6 7 8 9 10</a:t>
+            </a:r>
+          </a:p>
+          <a:p>
+            <a:r>
+              <a:rPr sz="1700">
+                <a:latin typeface="Courier New"/>
+              </a:rPr>
+              <a:t>var mid    = nums.</a:t>
+            </a:r>
+            <a:r>
+              <a:rPr sz="1700">
+                <a:solidFill>
+                  <a:srgbClr val="00B0F0"/>
+                </a:solidFill>
+                <a:latin typeface="Courier New"/>
+              </a:rPr>
+              <a:t>Skip</a:t>
+            </a:r>
+            <a:r>
+              <a:rPr sz="1700">
+                <a:latin typeface="Courier New"/>
+              </a:rPr>
+              <a:t>(2).</a:t>
+            </a:r>
+            <a:r>
+              <a:rPr sz="1700">
+                <a:solidFill>
+                  <a:srgbClr val="00B0F0"/>
+                </a:solidFill>
+                <a:latin typeface="Courier New"/>
+              </a:rPr>
+              <a:t>Take</a:t>
+            </a:r>
+            <a:r>
+              <a:rPr sz="1700">
+                <a:latin typeface="Courier New"/>
+              </a:rPr>
+              <a:t>(4);</a:t>
+            </a:r>
+            <a:r>
+              <a:rPr sz="1700">
+                <a:solidFill>
+                  <a:srgbClr val="008000"/>
+                </a:solidFill>
+                <a:latin typeface="Courier New"/>
+              </a:rPr>
+              <a:t>          // 3 4 5 6</a:t>
+            </a:r>
+          </a:p>
+          <a:p>
+            <a:r>
+              <a:rPr sz="1700">
+                <a:latin typeface="Courier New"/>
+              </a:rPr>
+              <a:t/>
+            </a:r>
+          </a:p>
+          <a:p>
+            <a:r>
+              <a:rPr sz="1700">
+                <a:solidFill>
+                  <a:srgbClr val="008000"/>
+                </a:solidFill>
+                <a:latin typeface="Courier New"/>
+              </a:rPr>
+              <a:t>// Пагинация — страница P с по N елемента на страница:</a:t>
+            </a:r>
+          </a:p>
+          <a:p>
+            <a:r>
+              <a:rPr sz="1700">
+                <a:latin typeface="Courier New"/>
+              </a:rPr>
+              <a:t>int pageSize = 3;</a:t>
+            </a:r>
+          </a:p>
+          <a:p>
+            <a:r>
+              <a:rPr sz="1700">
+                <a:latin typeface="Courier New"/>
+              </a:rPr>
+              <a:t>int page = 2;  // страница 2 (0-базирана)</a:t>
+            </a:r>
+          </a:p>
+          <a:p>
+            <a:r>
+              <a:rPr sz="1700">
+                <a:latin typeface="Courier New"/>
+              </a:rPr>
+              <a:t>var pageData = nums</a:t>
+            </a:r>
+          </a:p>
+          <a:p>
+            <a:r>
+              <a:rPr sz="1700">
+                <a:latin typeface="Courier New"/>
+              </a:rPr>
+              <a:t>    .</a:t>
+            </a:r>
+            <a:r>
+              <a:rPr sz="1700">
+                <a:solidFill>
+                  <a:srgbClr val="00B0F0"/>
+                </a:solidFill>
+                <a:latin typeface="Courier New"/>
+              </a:rPr>
+              <a:t>Skip</a:t>
+            </a:r>
+            <a:r>
+              <a:rPr sz="1700">
+                <a:latin typeface="Courier New"/>
+              </a:rPr>
+              <a:t>(page * pageSize)</a:t>
+            </a:r>
+          </a:p>
+          <a:p>
+            <a:r>
+              <a:rPr sz="1700">
+                <a:latin typeface="Courier New"/>
+              </a:rPr>
+              <a:t>    .</a:t>
+            </a:r>
+            <a:r>
+              <a:rPr sz="1700">
+                <a:solidFill>
+                  <a:srgbClr val="00B0F0"/>
+                </a:solidFill>
+                <a:latin typeface="Courier New"/>
+              </a:rPr>
+              <a:t>Take</a:t>
+            </a:r>
+            <a:r>
+              <a:rPr sz="1700">
+                <a:latin typeface="Courier New"/>
+              </a:rPr>
+              <a:t>(pageSize);</a:t>
+            </a:r>
+            <a:r>
+              <a:rPr sz="1700">
+                <a:solidFill>
+                  <a:srgbClr val="008000"/>
+                </a:solidFill>
+                <a:latin typeface="Courier New"/>
+              </a:rPr>
+              <a:t>     // 7 8 9</a:t>
+            </a:r>
+          </a:p>
+          <a:p>
+            <a:r>
+              <a:rPr sz="1700">
+                <a:latin typeface="Courier New"/>
+              </a:rPr>
+              <a:t/>
+            </a:r>
+          </a:p>
+          <a:p>
+            <a:r>
+              <a:rPr sz="1700">
+                <a:latin typeface="Courier New"/>
+              </a:rPr>
+              <a:t>// TakeLast / SkipLast (C# 8+):  nums.</a:t>
+            </a:r>
+            <a:r>
+              <a:rPr sz="1700">
+                <a:solidFill>
+                  <a:srgbClr val="00B0F0"/>
+                </a:solidFill>
+                <a:latin typeface="Courier New"/>
+              </a:rPr>
+              <a:t>TakeLast</a:t>
+            </a:r>
+            <a:r>
+              <a:rPr sz="1700">
+                <a:solidFill>
+                  <a:srgbClr val="008000"/>
+                </a:solidFill>
+                <a:latin typeface="Courier New"/>
+              </a:rPr>
+              <a:t>(3)  // 8 9 10</a:t>
+            </a:r>
+          </a:p>
+        </p:txBody>
+      </p:sp>
+    </p:spTree>
+  </p:cSld>
+  <p:clrMapOvr>
+    <a:masterClrMapping/>
+  </p:clrMapOvr>
+</p:sld>
+</file>
+
+<file path=ppt/slides/slide19.xml><?xml version="1.0" encoding="utf-8"?>
+<p:sld xmlns:a="http://schemas.openxmlformats.org/drawingml/2006/main" xmlns:p="http://schemas.openxmlformats.org/presentationml/2006/main" xmlns:r="http://schemas.openxmlformats.org/officeDocument/2006/relationships">
+  <p:cSld>
+    <p:bg>
+      <p:bgPr>
+        <a:solidFill>
+          <a:srgbClr val="FFFFFF"/>
+        </a:solidFill>
+        <a:effectLst/>
+      </p:bgPr>
+    </p:bg>
+    <p:spTree>
+      <p:nvGrpSpPr>
+        <p:cNvPr id="1" name=""/>
+        <p:cNvGrpSpPr/>
+        <p:nvPr/>
+      </p:nvGrpSpPr>
+      <p:grpSpPr/>
+      <p:sp>
+        <p:nvSpPr>
+          <p:cNvPr id="2" name="TextBox 1"/>
+          <p:cNvSpPr txBox="1"/>
+          <p:nvPr/>
+        </p:nvSpPr>
+        <p:spPr>
+          <a:xfrm>
+            <a:off x="457200" y="320040"/>
+            <a:ext cx="11274552" cy="777240"/>
+          </a:xfrm>
+          <a:prstGeom prst="rect">
+            <a:avLst/>
+          </a:prstGeom>
+          <a:solidFill>
+            <a:srgbClr val="1F497D"/>
+          </a:solidFill>
+        </p:spPr>
+        <p:txBody>
+          <a:bodyPr wrap="square">
+            <a:spAutoFit/>
+          </a:bodyPr>
+          <a:lstStyle/>
+          <a:p>
+            <a:r>
+              <a:rPr sz="3600" b="1">
+                <a:solidFill>
+                  <a:srgbClr val="FFFFFF"/>
+                </a:solidFill>
+              </a:rPr>
+              <a:t>GroupBy() — Групиране на елементи</a:t>
+            </a:r>
+          </a:p>
+        </p:txBody>
+      </p:sp>
+      <p:sp>
+        <p:nvSpPr>
+          <p:cNvPr id="3" name="TextBox 2"/>
+          <p:cNvSpPr txBox="1"/>
+          <p:nvPr/>
+        </p:nvSpPr>
+        <p:spPr>
+          <a:xfrm>
+            <a:off x="457200" y="1207008"/>
+            <a:ext cx="11274552" cy="594360"/>
+          </a:xfrm>
+          <a:prstGeom prst="rect">
+            <a:avLst/>
+          </a:prstGeom>
+          <a:noFill/>
+        </p:spPr>
+        <p:txBody>
+          <a:bodyPr wrap="square">
+            <a:spAutoFit/>
+          </a:bodyPr>
+          <a:lstStyle/>
+          <a:p>
+            <a:r>
+              <a:rPr sz="1900">
+                <a:solidFill>
+                  <a:srgbClr val="1F1F1F"/>
+                </a:solidFill>
+              </a:rPr>
+              <a:t>GroupBy() разделя колекцията на групи по зададен ключ — аналог на GROUP BY в SQL.</a:t>
+            </a:r>
+          </a:p>
+        </p:txBody>
+      </p:sp>
+      <p:sp>
+        <p:nvSpPr>
+          <p:cNvPr id="4" name="TextBox 3"/>
+          <p:cNvSpPr txBox="1"/>
+          <p:nvPr/>
+        </p:nvSpPr>
+        <p:spPr>
+          <a:xfrm>
+            <a:off x="457200" y="1828800"/>
+            <a:ext cx="11274552" cy="4114800"/>
+          </a:xfrm>
+          <a:prstGeom prst="rect">
+            <a:avLst/>
+          </a:prstGeom>
+          <a:solidFill>
+            <a:srgbClr val="F0F0F0"/>
+          </a:solidFill>
+        </p:spPr>
+        <p:txBody>
+          <a:bodyPr wrap="none">
+            <a:spAutoFit/>
+          </a:bodyPr>
+          <a:lstStyle/>
+          <a:p>
+            <a:r>
+              <a:rPr sz="1700">
+                <a:latin typeface="Courier New"/>
+              </a:rPr>
+              <a:t>string[] words = { "apple", "ant", "ball", "cat", "car", "bear" };</a:t>
+            </a:r>
+          </a:p>
+          <a:p>
+            <a:r>
+              <a:rPr sz="1700">
+                <a:latin typeface="Courier New"/>
+              </a:rPr>
+              <a:t/>
+            </a:r>
+          </a:p>
+          <a:p>
+            <a:r>
+              <a:rPr sz="1700">
+                <a:solidFill>
+                  <a:srgbClr val="008000"/>
+                </a:solidFill>
+                <a:latin typeface="Courier New"/>
+              </a:rPr>
+              <a:t>// Групираме по първата буква:</a:t>
+            </a:r>
+          </a:p>
+          <a:p>
+            <a:r>
+              <a:rPr sz="1700">
+                <a:latin typeface="Courier New"/>
+              </a:rPr>
+              <a:t>var groups = words.</a:t>
+            </a:r>
+            <a:r>
+              <a:rPr sz="1700">
+                <a:solidFill>
+                  <a:srgbClr val="00B0F0"/>
+                </a:solidFill>
+                <a:latin typeface="Courier New"/>
+              </a:rPr>
+              <a:t>GroupBy</a:t>
+            </a:r>
+            <a:r>
+              <a:rPr sz="1700">
+                <a:latin typeface="Courier New"/>
+              </a:rPr>
+              <a:t>(w =&gt; w[0]);</a:t>
+            </a:r>
+          </a:p>
+          <a:p>
+            <a:r>
+              <a:rPr sz="1700">
+                <a:latin typeface="Courier New"/>
+              </a:rPr>
+              <a:t/>
+            </a:r>
+          </a:p>
+          <a:p>
+            <a:r>
+              <a:rPr sz="1700">
+                <a:latin typeface="Courier New"/>
+              </a:rPr>
+              <a:t>foreach (var group in groups)</a:t>
+            </a:r>
+          </a:p>
+          <a:p>
+            <a:r>
+              <a:rPr sz="1700">
+                <a:latin typeface="Courier New"/>
+              </a:rPr>
+              <a:t>{</a:t>
+            </a:r>
+          </a:p>
+          <a:p>
+            <a:r>
+              <a:rPr sz="1700">
+                <a:latin typeface="Courier New"/>
+              </a:rPr>
+              <a:t>    Console.Write($"Буква '{group.Key}': ");</a:t>
+            </a:r>
+          </a:p>
+          <a:p>
+            <a:r>
+              <a:rPr sz="1700">
+                <a:latin typeface="Courier New"/>
+              </a:rPr>
+              <a:t>    Console.WriteLine(string.</a:t>
+            </a:r>
+            <a:r>
+              <a:rPr sz="1700">
+                <a:solidFill>
+                  <a:srgbClr val="00B0F0"/>
+                </a:solidFill>
+                <a:latin typeface="Courier New"/>
+              </a:rPr>
+              <a:t>Join</a:t>
+            </a:r>
+            <a:r>
+              <a:rPr sz="1700">
+                <a:latin typeface="Courier New"/>
+              </a:rPr>
+              <a:t>(", ", group));</a:t>
+            </a:r>
+          </a:p>
+          <a:p>
+            <a:r>
+              <a:rPr sz="1700">
+                <a:latin typeface="Courier New"/>
+              </a:rPr>
+              <a:t>}</a:t>
+            </a:r>
+          </a:p>
+          <a:p>
+            <a:r>
+              <a:rPr sz="1700">
+                <a:latin typeface="Courier New"/>
+              </a:rPr>
+              <a:t/>
+            </a:r>
+          </a:p>
+          <a:p>
+            <a:r>
+              <a:rPr sz="1700">
+                <a:solidFill>
+                  <a:srgbClr val="008000"/>
+                </a:solidFill>
+                <a:latin typeface="Courier New"/>
+              </a:rPr>
+              <a:t>// Изход:</a:t>
+            </a:r>
+          </a:p>
+          <a:p>
+            <a:r>
+              <a:rPr sz="1700">
+                <a:solidFill>
+                  <a:srgbClr val="008000"/>
+                </a:solidFill>
+                <a:latin typeface="Courier New"/>
+              </a:rPr>
+              <a:t>// Буква 'a': apple, ant</a:t>
+            </a:r>
+          </a:p>
+          <a:p>
+            <a:r>
+              <a:rPr sz="1700">
+                <a:solidFill>
+                  <a:srgbClr val="008000"/>
+                </a:solidFill>
+                <a:latin typeface="Courier New"/>
+              </a:rPr>
+              <a:t>// Буква 'b': ball, bear</a:t>
+            </a:r>
+          </a:p>
+          <a:p>
+            <a:r>
+              <a:rPr sz="1700">
+                <a:solidFill>
+                  <a:srgbClr val="008000"/>
+                </a:solidFill>
+                <a:latin typeface="Courier New"/>
+              </a:rPr>
+              <a:t>// Буква 'c': cat, car</a:t>
+            </a:r>
+          </a:p>
+        </p:txBody>
+      </p:sp>
+    </p:spTree>
+  </p:cSld>
+  <p:clrMapOvr>
+    <a:masterClrMapping/>
+  </p:clrMapOvr>
+</p:sld>
+</file>
+
 <file path=ppt/slides/slide2.xml><?xml version="1.0" encoding="utf-8"?>
 <p:sld xmlns:a="http://schemas.openxmlformats.org/drawingml/2006/main" xmlns:r="http://schemas.openxmlformats.org/officeDocument/2006/relationships" xmlns:p="http://schemas.openxmlformats.org/presentationml/2006/main">
   <p:cSld>
@@ -7219,6 +10628,434 @@
         <p14:creationId xmlns:p14="http://schemas.microsoft.com/office/powerpoint/2010/main" val="152034976"/>
       </p:ext>
     </p:extLst>
+  </p:cSld>
+  <p:clrMapOvr>
+    <a:masterClrMapping/>
+  </p:clrMapOvr>
+</p:sld>
+</file>
+
+<file path=ppt/slides/slide20.xml><?xml version="1.0" encoding="utf-8"?>
+<p:sld xmlns:a="http://schemas.openxmlformats.org/drawingml/2006/main" xmlns:p="http://schemas.openxmlformats.org/presentationml/2006/main" xmlns:r="http://schemas.openxmlformats.org/officeDocument/2006/relationships">
+  <p:cSld>
+    <p:bg>
+      <p:bgPr>
+        <a:solidFill>
+          <a:srgbClr val="FFFFFF"/>
+        </a:solidFill>
+        <a:effectLst/>
+      </p:bgPr>
+    </p:bg>
+    <p:spTree>
+      <p:nvGrpSpPr>
+        <p:cNvPr id="1" name=""/>
+        <p:cNvGrpSpPr/>
+        <p:nvPr/>
+      </p:nvGrpSpPr>
+      <p:grpSpPr/>
+      <p:sp>
+        <p:nvSpPr>
+          <p:cNvPr id="2" name="TextBox 1"/>
+          <p:cNvSpPr txBox="1"/>
+          <p:nvPr/>
+        </p:nvSpPr>
+        <p:spPr>
+          <a:xfrm>
+            <a:off x="457200" y="320040"/>
+            <a:ext cx="11274552" cy="777240"/>
+          </a:xfrm>
+          <a:prstGeom prst="rect">
+            <a:avLst/>
+          </a:prstGeom>
+          <a:solidFill>
+            <a:srgbClr val="1F497D"/>
+          </a:solidFill>
+        </p:spPr>
+        <p:txBody>
+          <a:bodyPr wrap="square">
+            <a:spAutoFit/>
+          </a:bodyPr>
+          <a:lstStyle/>
+          <a:p>
+            <a:r>
+              <a:rPr sz="3600" b="1">
+                <a:solidFill>
+                  <a:srgbClr val="FFFFFF"/>
+                </a:solidFill>
+              </a:rPr>
+              <a:t>Верига от LINQ методи (Method Chaining)</a:t>
+            </a:r>
+          </a:p>
+        </p:txBody>
+      </p:sp>
+      <p:sp>
+        <p:nvSpPr>
+          <p:cNvPr id="3" name="TextBox 2"/>
+          <p:cNvSpPr txBox="1"/>
+          <p:nvPr/>
+        </p:nvSpPr>
+        <p:spPr>
+          <a:xfrm>
+            <a:off x="457200" y="1207008"/>
+            <a:ext cx="11274552" cy="594360"/>
+          </a:xfrm>
+          <a:prstGeom prst="rect">
+            <a:avLst/>
+          </a:prstGeom>
+          <a:noFill/>
+        </p:spPr>
+        <p:txBody>
+          <a:bodyPr wrap="square">
+            <a:spAutoFit/>
+          </a:bodyPr>
+          <a:lstStyle/>
+          <a:p>
+            <a:r>
+              <a:rPr sz="1900">
+                <a:solidFill>
+                  <a:srgbClr val="1F1F1F"/>
+                </a:solidFill>
+              </a:rPr>
+              <a:t>LINQ методите могат да се наредят един след друг — всеки получава резултата от предишния.</a:t>
+            </a:r>
+          </a:p>
+        </p:txBody>
+      </p:sp>
+      <p:sp>
+        <p:nvSpPr>
+          <p:cNvPr id="4" name="TextBox 3"/>
+          <p:cNvSpPr txBox="1"/>
+          <p:nvPr/>
+        </p:nvSpPr>
+        <p:spPr>
+          <a:xfrm>
+            <a:off x="457200" y="1828800"/>
+            <a:ext cx="11274552" cy="4114800"/>
+          </a:xfrm>
+          <a:prstGeom prst="rect">
+            <a:avLst/>
+          </a:prstGeom>
+          <a:solidFill>
+            <a:srgbClr val="F0F0F0"/>
+          </a:solidFill>
+        </p:spPr>
+        <p:txBody>
+          <a:bodyPr wrap="none">
+            <a:spAutoFit/>
+          </a:bodyPr>
+          <a:lstStyle/>
+          <a:p>
+            <a:r>
+              <a:rPr sz="1700">
+                <a:solidFill>
+                  <a:srgbClr val="008000"/>
+                </a:solidFill>
+                <a:latin typeface="Courier New"/>
+              </a:rPr>
+              <a:t>// Задача: топ 3 четни числа над 10, сортирани намаляващо</a:t>
+            </a:r>
+          </a:p>
+          <a:p>
+            <a:r>
+              <a:rPr sz="1700">
+                <a:latin typeface="Courier New"/>
+              </a:rPr>
+              <a:t>int[] data = { 5, 14, 3, 22, 8, 31, 18, 42, 7, 16 };</a:t>
+            </a:r>
+          </a:p>
+          <a:p>
+            <a:r>
+              <a:rPr sz="1700">
+                <a:latin typeface="Courier New"/>
+              </a:rPr>
+              <a:t/>
+            </a:r>
+          </a:p>
+          <a:p>
+            <a:r>
+              <a:rPr sz="1700">
+                <a:latin typeface="Courier New"/>
+              </a:rPr>
+              <a:t>int[] result = data</a:t>
+            </a:r>
+          </a:p>
+          <a:p>
+            <a:r>
+              <a:rPr sz="1700">
+                <a:latin typeface="Courier New"/>
+              </a:rPr>
+              <a:t>    .</a:t>
+            </a:r>
+            <a:r>
+              <a:rPr sz="1700">
+                <a:solidFill>
+                  <a:srgbClr val="00B0F0"/>
+                </a:solidFill>
+                <a:latin typeface="Courier New"/>
+              </a:rPr>
+              <a:t>Where</a:t>
+            </a:r>
+            <a:r>
+              <a:rPr sz="1700">
+                <a:latin typeface="Courier New"/>
+              </a:rPr>
+              <a:t>(x =&gt; x &gt; 10)</a:t>
+            </a:r>
+          </a:p>
+          <a:p>
+            <a:r>
+              <a:rPr sz="1700">
+                <a:latin typeface="Courier New"/>
+              </a:rPr>
+              <a:t>    .</a:t>
+            </a:r>
+            <a:r>
+              <a:rPr sz="1700">
+                <a:solidFill>
+                  <a:srgbClr val="00B0F0"/>
+                </a:solidFill>
+                <a:latin typeface="Courier New"/>
+              </a:rPr>
+              <a:t>Where</a:t>
+            </a:r>
+            <a:r>
+              <a:rPr sz="1700">
+                <a:latin typeface="Courier New"/>
+              </a:rPr>
+              <a:t>(x =&gt; x % 2 == 0)</a:t>
+            </a:r>
+          </a:p>
+          <a:p>
+            <a:r>
+              <a:rPr sz="1700">
+                <a:latin typeface="Courier New"/>
+              </a:rPr>
+              <a:t>    .</a:t>
+            </a:r>
+            <a:r>
+              <a:rPr sz="1700">
+                <a:solidFill>
+                  <a:srgbClr val="00B0F0"/>
+                </a:solidFill>
+                <a:latin typeface="Courier New"/>
+              </a:rPr>
+              <a:t>OrderByDescending</a:t>
+            </a:r>
+            <a:r>
+              <a:rPr sz="1700">
+                <a:latin typeface="Courier New"/>
+              </a:rPr>
+              <a:t>(x =&gt; x)</a:t>
+            </a:r>
+          </a:p>
+          <a:p>
+            <a:r>
+              <a:rPr sz="1700">
+                <a:latin typeface="Courier New"/>
+              </a:rPr>
+              <a:t>    .</a:t>
+            </a:r>
+            <a:r>
+              <a:rPr sz="1700">
+                <a:solidFill>
+                  <a:srgbClr val="00B0F0"/>
+                </a:solidFill>
+                <a:latin typeface="Courier New"/>
+              </a:rPr>
+              <a:t>Take</a:t>
+            </a:r>
+            <a:r>
+              <a:rPr sz="1700">
+                <a:latin typeface="Courier New"/>
+              </a:rPr>
+              <a:t>(3)</a:t>
+            </a:r>
+          </a:p>
+          <a:p>
+            <a:r>
+              <a:rPr sz="1700">
+                <a:latin typeface="Courier New"/>
+              </a:rPr>
+              <a:t>    .</a:t>
+            </a:r>
+            <a:r>
+              <a:rPr sz="1700">
+                <a:solidFill>
+                  <a:srgbClr val="00B0F0"/>
+                </a:solidFill>
+                <a:latin typeface="Courier New"/>
+              </a:rPr>
+              <a:t>ToArray</a:t>
+            </a:r>
+            <a:r>
+              <a:rPr sz="1700">
+                <a:latin typeface="Courier New"/>
+              </a:rPr>
+              <a:t>();</a:t>
+            </a:r>
+          </a:p>
+          <a:p>
+            <a:r>
+              <a:rPr sz="1700">
+                <a:solidFill>
+                  <a:srgbClr val="008000"/>
+                </a:solidFill>
+                <a:latin typeface="Courier New"/>
+              </a:rPr>
+              <a:t>// result = [ 42, 22, 18 ]</a:t>
+            </a:r>
+          </a:p>
+          <a:p>
+            <a:r>
+              <a:rPr sz="1700">
+                <a:latin typeface="Courier New"/>
+              </a:rPr>
+              <a:t/>
+            </a:r>
+          </a:p>
+          <a:p>
+            <a:r>
+              <a:rPr sz="1700">
+                <a:solidFill>
+                  <a:srgbClr val="008000"/>
+                </a:solidFill>
+                <a:latin typeface="Courier New"/>
+              </a:rPr>
+              <a:t>// Обработка на текст: уникални думи над 4 букви, главни букви, сортирани:</a:t>
+            </a:r>
+          </a:p>
+          <a:p>
+            <a:r>
+              <a:rPr sz="1700">
+                <a:latin typeface="Courier New"/>
+              </a:rPr>
+              <a:t>string text = "the quick brown fox jumps over the lazy dog";</a:t>
+            </a:r>
+          </a:p>
+          <a:p>
+            <a:r>
+              <a:rPr sz="1700">
+                <a:latin typeface="Courier New"/>
+              </a:rPr>
+              <a:t>var result2 = text.</a:t>
+            </a:r>
+            <a:r>
+              <a:rPr sz="1700">
+                <a:solidFill>
+                  <a:srgbClr val="00B0F0"/>
+                </a:solidFill>
+                <a:latin typeface="Courier New"/>
+              </a:rPr>
+              <a:t>Split</a:t>
+            </a:r>
+            <a:r>
+              <a:rPr sz="1700">
+                <a:latin typeface="Courier New"/>
+              </a:rPr>
+              <a:t>(' ').</a:t>
+            </a:r>
+            <a:r>
+              <a:rPr sz="1700">
+                <a:solidFill>
+                  <a:srgbClr val="00B0F0"/>
+                </a:solidFill>
+                <a:latin typeface="Courier New"/>
+              </a:rPr>
+              <a:t>Where</a:t>
+            </a:r>
+            <a:r>
+              <a:rPr sz="1700">
+                <a:latin typeface="Courier New"/>
+              </a:rPr>
+              <a:t>(w =&gt; w.Length &gt; 4).</a:t>
+            </a:r>
+            <a:r>
+              <a:rPr sz="1700">
+                <a:solidFill>
+                  <a:srgbClr val="00B0F0"/>
+                </a:solidFill>
+                <a:latin typeface="Courier New"/>
+              </a:rPr>
+              <a:t>Distinct</a:t>
+            </a:r>
+            <a:r>
+              <a:rPr sz="1700">
+                <a:latin typeface="Courier New"/>
+              </a:rPr>
+              <a:t>().</a:t>
+            </a:r>
+          </a:p>
+          <a:p>
+            <a:r>
+              <a:rPr sz="1700">
+                <a:latin typeface="Courier New"/>
+              </a:rPr>
+              <a:t>    .</a:t>
+            </a:r>
+            <a:r>
+              <a:rPr sz="1700">
+                <a:solidFill>
+                  <a:srgbClr val="00B0F0"/>
+                </a:solidFill>
+                <a:latin typeface="Courier New"/>
+              </a:rPr>
+              <a:t>Select</a:t>
+            </a:r>
+            <a:r>
+              <a:rPr sz="1700">
+                <a:latin typeface="Courier New"/>
+              </a:rPr>
+              <a:t>(w =&gt; w.</a:t>
+            </a:r>
+            <a:r>
+              <a:rPr sz="1700">
+                <a:solidFill>
+                  <a:srgbClr val="00B0F0"/>
+                </a:solidFill>
+                <a:latin typeface="Courier New"/>
+              </a:rPr>
+              <a:t>ToUpper</a:t>
+            </a:r>
+            <a:r>
+              <a:rPr sz="1700">
+                <a:latin typeface="Courier New"/>
+              </a:rPr>
+              <a:t>()).</a:t>
+            </a:r>
+            <a:r>
+              <a:rPr sz="1700">
+                <a:solidFill>
+                  <a:srgbClr val="00B0F0"/>
+                </a:solidFill>
+                <a:latin typeface="Courier New"/>
+              </a:rPr>
+              <a:t>OrderBy</a:t>
+            </a:r>
+            <a:r>
+              <a:rPr sz="1700">
+                <a:latin typeface="Courier New"/>
+              </a:rPr>
+              <a:t>(w =&gt; w).</a:t>
+            </a:r>
+            <a:r>
+              <a:rPr sz="1700">
+                <a:solidFill>
+                  <a:srgbClr val="00B0F0"/>
+                </a:solidFill>
+                <a:latin typeface="Courier New"/>
+              </a:rPr>
+              <a:t>ToList</a:t>
+            </a:r>
+            <a:r>
+              <a:rPr sz="1700">
+                <a:latin typeface="Courier New"/>
+              </a:rPr>
+              <a:t>();</a:t>
+            </a:r>
+          </a:p>
+        </p:txBody>
+      </p:sp>
+    </p:spTree>
   </p:cSld>
   <p:clrMapOvr>
     <a:masterClrMapping/>
